--- a/docs/presentation/Phase2_Midterm_Presentation.pptx
+++ b/docs/presentation/Phase2_Midterm_Presentation.pptx
@@ -5,25 +5,25 @@
     <p:sldMasterId id="2147483648" r:id="rId1"/>
   </p:sldMasterIdLst>
   <p:sldIdLst>
-    <p:sldId id="256" r:id="rId7"/>
-    <p:sldId id="257" r:id="rId8"/>
-    <p:sldId id="258" r:id="rId9"/>
-    <p:sldId id="259" r:id="rId10"/>
-    <p:sldId id="260" r:id="rId11"/>
-    <p:sldId id="261" r:id="rId12"/>
-    <p:sldId id="262" r:id="rId13"/>
-    <p:sldId id="263" r:id="rId14"/>
-    <p:sldId id="264" r:id="rId15"/>
-    <p:sldId id="265" r:id="rId16"/>
-    <p:sldId id="266" r:id="rId17"/>
-    <p:sldId id="267" r:id="rId18"/>
-    <p:sldId id="268" r:id="rId19"/>
-    <p:sldId id="269" r:id="rId20"/>
-    <p:sldId id="270" r:id="rId21"/>
-    <p:sldId id="271" r:id="rId22"/>
-    <p:sldId id="272" r:id="rId23"/>
+    <p:sldId id="256" r:id="rId2"/>
+    <p:sldId id="257" r:id="rId3"/>
+    <p:sldId id="258" r:id="rId4"/>
+    <p:sldId id="259" r:id="rId5"/>
+    <p:sldId id="260" r:id="rId6"/>
+    <p:sldId id="261" r:id="rId7"/>
+    <p:sldId id="262" r:id="rId8"/>
+    <p:sldId id="263" r:id="rId9"/>
+    <p:sldId id="264" r:id="rId10"/>
+    <p:sldId id="265" r:id="rId11"/>
+    <p:sldId id="266" r:id="rId12"/>
+    <p:sldId id="267" r:id="rId13"/>
+    <p:sldId id="268" r:id="rId14"/>
+    <p:sldId id="269" r:id="rId15"/>
+    <p:sldId id="270" r:id="rId16"/>
+    <p:sldId id="271" r:id="rId17"/>
+    <p:sldId id="272" r:id="rId18"/>
   </p:sldIdLst>
-  <p:sldSz cx="12191695" cy="6858000" type="screen4x3"/>
+  <p:sldSz cx="12192000" cy="6858000"/>
   <p:notesSz cx="6858000" cy="9144000"/>
   <p:defaultTextStyle>
     <a:defPPr>
@@ -120,6 +120,22 @@
       </a:defRPr>
     </a:lvl9pPr>
   </p:defaultTextStyle>
+  <p:extLst>
+    <p:ext uri="{EFAFB233-063F-42B5-8137-9DF3F51BA10A}">
+      <p15:sldGuideLst xmlns:p15="http://schemas.microsoft.com/office/powerpoint/2012/main">
+        <p15:guide id="1" orient="horz" pos="2160">
+          <p15:clr>
+            <a:srgbClr val="A4A3A4"/>
+          </p15:clr>
+        </p15:guide>
+        <p15:guide id="2" pos="2880">
+          <p15:clr>
+            <a:srgbClr val="A4A3A4"/>
+          </p15:clr>
+        </p15:guide>
+      </p15:sldGuideLst>
+    </p:ext>
+  </p:extLst>
 </p:presentation>
 </file>
 
@@ -161,10 +177,9 @@
           <a:lstStyle/>
           <a:p>
             <a:r>
-              <a:rPr lang="en-US" smtClean="0"/>
+              <a:rPr lang="en-US"/>
               <a:t>Click to edit Master title style</a:t>
             </a:r>
-            <a:endParaRPr lang="en-US"/>
           </a:p>
         </p:txBody>
       </p:sp>
@@ -280,10 +295,9 @@
           </a:lstStyle>
           <a:p>
             <a:r>
-              <a:rPr lang="en-US" smtClean="0"/>
+              <a:rPr lang="en-US"/>
               <a:t>Click to edit Master subtitle style</a:t>
             </a:r>
-            <a:endParaRPr lang="en-US"/>
           </a:p>
         </p:txBody>
       </p:sp>
@@ -304,7 +318,7 @@
           <a:p>
             <a:fld id="{5BCAD085-E8A6-8845-BD4E-CB4CCA059FC4}" type="datetimeFigureOut">
               <a:rPr lang="en-US" smtClean="0"/>
-              <a:t>1/27/13</a:t>
+              <a:t>7/1/2026</a:t>
             </a:fld>
             <a:endParaRPr lang="en-US"/>
           </a:p>
@@ -398,10 +412,9 @@
           <a:lstStyle/>
           <a:p>
             <a:r>
-              <a:rPr lang="en-US" smtClean="0"/>
+              <a:rPr lang="en-US"/>
               <a:t>Click to edit Master title style</a:t>
             </a:r>
-            <a:endParaRPr lang="en-US"/>
           </a:p>
         </p:txBody>
       </p:sp>
@@ -422,38 +435,37 @@
           <a:p>
             <a:pPr lvl="0"/>
             <a:r>
-              <a:rPr lang="en-US" smtClean="0"/>
+              <a:rPr lang="en-US"/>
               <a:t>Click to edit Master text styles</a:t>
             </a:r>
           </a:p>
           <a:p>
             <a:pPr lvl="1"/>
             <a:r>
-              <a:rPr lang="en-US" smtClean="0"/>
+              <a:rPr lang="en-US"/>
               <a:t>Second level</a:t>
             </a:r>
           </a:p>
           <a:p>
             <a:pPr lvl="2"/>
             <a:r>
-              <a:rPr lang="en-US" smtClean="0"/>
+              <a:rPr lang="en-US"/>
               <a:t>Third level</a:t>
             </a:r>
           </a:p>
           <a:p>
             <a:pPr lvl="3"/>
             <a:r>
-              <a:rPr lang="en-US" smtClean="0"/>
+              <a:rPr lang="en-US"/>
               <a:t>Fourth level</a:t>
             </a:r>
           </a:p>
           <a:p>
             <a:pPr lvl="4"/>
             <a:r>
-              <a:rPr lang="en-US" smtClean="0"/>
+              <a:rPr lang="en-US"/>
               <a:t>Fifth level</a:t>
             </a:r>
-            <a:endParaRPr lang="en-US"/>
           </a:p>
         </p:txBody>
       </p:sp>
@@ -474,7 +486,7 @@
           <a:p>
             <a:fld id="{5BCAD085-E8A6-8845-BD4E-CB4CCA059FC4}" type="datetimeFigureOut">
               <a:rPr lang="en-US" smtClean="0"/>
-              <a:t>1/27/13</a:t>
+              <a:t>7/1/2026</a:t>
             </a:fld>
             <a:endParaRPr lang="en-US"/>
           </a:p>
@@ -573,10 +585,9 @@
           <a:lstStyle/>
           <a:p>
             <a:r>
-              <a:rPr lang="en-US" smtClean="0"/>
+              <a:rPr lang="en-US"/>
               <a:t>Click to edit Master title style</a:t>
             </a:r>
-            <a:endParaRPr lang="en-US"/>
           </a:p>
         </p:txBody>
       </p:sp>
@@ -602,38 +613,37 @@
           <a:p>
             <a:pPr lvl="0"/>
             <a:r>
-              <a:rPr lang="en-US" smtClean="0"/>
+              <a:rPr lang="en-US"/>
               <a:t>Click to edit Master text styles</a:t>
             </a:r>
           </a:p>
           <a:p>
             <a:pPr lvl="1"/>
             <a:r>
-              <a:rPr lang="en-US" smtClean="0"/>
+              <a:rPr lang="en-US"/>
               <a:t>Second level</a:t>
             </a:r>
           </a:p>
           <a:p>
             <a:pPr lvl="2"/>
             <a:r>
-              <a:rPr lang="en-US" smtClean="0"/>
+              <a:rPr lang="en-US"/>
               <a:t>Third level</a:t>
             </a:r>
           </a:p>
           <a:p>
             <a:pPr lvl="3"/>
             <a:r>
-              <a:rPr lang="en-US" smtClean="0"/>
+              <a:rPr lang="en-US"/>
               <a:t>Fourth level</a:t>
             </a:r>
           </a:p>
           <a:p>
             <a:pPr lvl="4"/>
             <a:r>
-              <a:rPr lang="en-US" smtClean="0"/>
+              <a:rPr lang="en-US"/>
               <a:t>Fifth level</a:t>
             </a:r>
-            <a:endParaRPr lang="en-US"/>
           </a:p>
         </p:txBody>
       </p:sp>
@@ -654,7 +664,7 @@
           <a:p>
             <a:fld id="{5BCAD085-E8A6-8845-BD4E-CB4CCA059FC4}" type="datetimeFigureOut">
               <a:rPr lang="en-US" smtClean="0"/>
-              <a:t>1/27/13</a:t>
+              <a:t>7/1/2026</a:t>
             </a:fld>
             <a:endParaRPr lang="en-US"/>
           </a:p>
@@ -748,10 +758,9 @@
           <a:lstStyle/>
           <a:p>
             <a:r>
-              <a:rPr lang="en-US" smtClean="0"/>
+              <a:rPr lang="en-US"/>
               <a:t>Click to edit Master title style</a:t>
             </a:r>
-            <a:endParaRPr lang="en-US"/>
           </a:p>
         </p:txBody>
       </p:sp>
@@ -772,38 +781,37 @@
           <a:p>
             <a:pPr lvl="0"/>
             <a:r>
-              <a:rPr lang="en-US" smtClean="0"/>
+              <a:rPr lang="en-US"/>
               <a:t>Click to edit Master text styles</a:t>
             </a:r>
           </a:p>
           <a:p>
             <a:pPr lvl="1"/>
             <a:r>
-              <a:rPr lang="en-US" smtClean="0"/>
+              <a:rPr lang="en-US"/>
               <a:t>Second level</a:t>
             </a:r>
           </a:p>
           <a:p>
             <a:pPr lvl="2"/>
             <a:r>
-              <a:rPr lang="en-US" smtClean="0"/>
+              <a:rPr lang="en-US"/>
               <a:t>Third level</a:t>
             </a:r>
           </a:p>
           <a:p>
             <a:pPr lvl="3"/>
             <a:r>
-              <a:rPr lang="en-US" smtClean="0"/>
+              <a:rPr lang="en-US"/>
               <a:t>Fourth level</a:t>
             </a:r>
           </a:p>
           <a:p>
             <a:pPr lvl="4"/>
             <a:r>
-              <a:rPr lang="en-US" smtClean="0"/>
+              <a:rPr lang="en-US"/>
               <a:t>Fifth level</a:t>
             </a:r>
-            <a:endParaRPr lang="en-US"/>
           </a:p>
         </p:txBody>
       </p:sp>
@@ -824,7 +832,7 @@
           <a:p>
             <a:fld id="{5BCAD085-E8A6-8845-BD4E-CB4CCA059FC4}" type="datetimeFigureOut">
               <a:rPr lang="en-US" smtClean="0"/>
-              <a:t>1/27/13</a:t>
+              <a:t>7/1/2026</a:t>
             </a:fld>
             <a:endParaRPr lang="en-US"/>
           </a:p>
@@ -927,10 +935,9 @@
           </a:lstStyle>
           <a:p>
             <a:r>
-              <a:rPr lang="en-US" smtClean="0"/>
+              <a:rPr lang="en-US"/>
               <a:t>Click to edit Master title style</a:t>
             </a:r>
-            <a:endParaRPr lang="en-US"/>
           </a:p>
         </p:txBody>
       </p:sp>
@@ -1047,7 +1054,7 @@
           <a:p>
             <a:pPr lvl="0"/>
             <a:r>
-              <a:rPr lang="en-US" smtClean="0"/>
+              <a:rPr lang="en-US"/>
               <a:t>Click to edit Master text styles</a:t>
             </a:r>
           </a:p>
@@ -1070,7 +1077,7 @@
           <a:p>
             <a:fld id="{5BCAD085-E8A6-8845-BD4E-CB4CCA059FC4}" type="datetimeFigureOut">
               <a:rPr lang="en-US" smtClean="0"/>
-              <a:t>1/27/13</a:t>
+              <a:t>7/1/2026</a:t>
             </a:fld>
             <a:endParaRPr lang="en-US"/>
           </a:p>
@@ -1164,10 +1171,9 @@
           <a:lstStyle/>
           <a:p>
             <a:r>
-              <a:rPr lang="en-US" smtClean="0"/>
+              <a:rPr lang="en-US"/>
               <a:t>Click to edit Master title style</a:t>
             </a:r>
-            <a:endParaRPr lang="en-US"/>
           </a:p>
         </p:txBody>
       </p:sp>
@@ -1221,38 +1227,37 @@
           <a:p>
             <a:pPr lvl="0"/>
             <a:r>
-              <a:rPr lang="en-US" smtClean="0"/>
+              <a:rPr lang="en-US"/>
               <a:t>Click to edit Master text styles</a:t>
             </a:r>
           </a:p>
           <a:p>
             <a:pPr lvl="1"/>
             <a:r>
-              <a:rPr lang="en-US" smtClean="0"/>
+              <a:rPr lang="en-US"/>
               <a:t>Second level</a:t>
             </a:r>
           </a:p>
           <a:p>
             <a:pPr lvl="2"/>
             <a:r>
-              <a:rPr lang="en-US" smtClean="0"/>
+              <a:rPr lang="en-US"/>
               <a:t>Third level</a:t>
             </a:r>
           </a:p>
           <a:p>
             <a:pPr lvl="3"/>
             <a:r>
-              <a:rPr lang="en-US" smtClean="0"/>
+              <a:rPr lang="en-US"/>
               <a:t>Fourth level</a:t>
             </a:r>
           </a:p>
           <a:p>
             <a:pPr lvl="4"/>
             <a:r>
-              <a:rPr lang="en-US" smtClean="0"/>
+              <a:rPr lang="en-US"/>
               <a:t>Fifth level</a:t>
             </a:r>
-            <a:endParaRPr lang="en-US"/>
           </a:p>
         </p:txBody>
       </p:sp>
@@ -1306,38 +1311,37 @@
           <a:p>
             <a:pPr lvl="0"/>
             <a:r>
-              <a:rPr lang="en-US" smtClean="0"/>
+              <a:rPr lang="en-US"/>
               <a:t>Click to edit Master text styles</a:t>
             </a:r>
           </a:p>
           <a:p>
             <a:pPr lvl="1"/>
             <a:r>
-              <a:rPr lang="en-US" smtClean="0"/>
+              <a:rPr lang="en-US"/>
               <a:t>Second level</a:t>
             </a:r>
           </a:p>
           <a:p>
             <a:pPr lvl="2"/>
             <a:r>
-              <a:rPr lang="en-US" smtClean="0"/>
+              <a:rPr lang="en-US"/>
               <a:t>Third level</a:t>
             </a:r>
           </a:p>
           <a:p>
             <a:pPr lvl="3"/>
             <a:r>
-              <a:rPr lang="en-US" smtClean="0"/>
+              <a:rPr lang="en-US"/>
               <a:t>Fourth level</a:t>
             </a:r>
           </a:p>
           <a:p>
             <a:pPr lvl="4"/>
             <a:r>
-              <a:rPr lang="en-US" smtClean="0"/>
+              <a:rPr lang="en-US"/>
               <a:t>Fifth level</a:t>
             </a:r>
-            <a:endParaRPr lang="en-US"/>
           </a:p>
         </p:txBody>
       </p:sp>
@@ -1358,7 +1362,7 @@
           <a:p>
             <a:fld id="{5BCAD085-E8A6-8845-BD4E-CB4CCA059FC4}" type="datetimeFigureOut">
               <a:rPr lang="en-US" smtClean="0"/>
-              <a:t>1/27/13</a:t>
+              <a:t>7/1/2026</a:t>
             </a:fld>
             <a:endParaRPr lang="en-US"/>
           </a:p>
@@ -1456,10 +1460,9 @@
           </a:lstStyle>
           <a:p>
             <a:r>
-              <a:rPr lang="en-US" smtClean="0"/>
+              <a:rPr lang="en-US"/>
               <a:t>Click to edit Master title style</a:t>
             </a:r>
-            <a:endParaRPr lang="en-US"/>
           </a:p>
         </p:txBody>
       </p:sp>
@@ -1522,7 +1525,7 @@
           <a:p>
             <a:pPr lvl="0"/>
             <a:r>
-              <a:rPr lang="en-US" smtClean="0"/>
+              <a:rPr lang="en-US"/>
               <a:t>Click to edit Master text styles</a:t>
             </a:r>
           </a:p>
@@ -1578,38 +1581,37 @@
           <a:p>
             <a:pPr lvl="0"/>
             <a:r>
-              <a:rPr lang="en-US" smtClean="0"/>
+              <a:rPr lang="en-US"/>
               <a:t>Click to edit Master text styles</a:t>
             </a:r>
           </a:p>
           <a:p>
             <a:pPr lvl="1"/>
             <a:r>
-              <a:rPr lang="en-US" smtClean="0"/>
+              <a:rPr lang="en-US"/>
               <a:t>Second level</a:t>
             </a:r>
           </a:p>
           <a:p>
             <a:pPr lvl="2"/>
             <a:r>
-              <a:rPr lang="en-US" smtClean="0"/>
+              <a:rPr lang="en-US"/>
               <a:t>Third level</a:t>
             </a:r>
           </a:p>
           <a:p>
             <a:pPr lvl="3"/>
             <a:r>
-              <a:rPr lang="en-US" smtClean="0"/>
+              <a:rPr lang="en-US"/>
               <a:t>Fourth level</a:t>
             </a:r>
           </a:p>
           <a:p>
             <a:pPr lvl="4"/>
             <a:r>
-              <a:rPr lang="en-US" smtClean="0"/>
+              <a:rPr lang="en-US"/>
               <a:t>Fifth level</a:t>
             </a:r>
-            <a:endParaRPr lang="en-US"/>
           </a:p>
         </p:txBody>
       </p:sp>
@@ -1672,7 +1674,7 @@
           <a:p>
             <a:pPr lvl="0"/>
             <a:r>
-              <a:rPr lang="en-US" smtClean="0"/>
+              <a:rPr lang="en-US"/>
               <a:t>Click to edit Master text styles</a:t>
             </a:r>
           </a:p>
@@ -1728,38 +1730,37 @@
           <a:p>
             <a:pPr lvl="0"/>
             <a:r>
-              <a:rPr lang="en-US" smtClean="0"/>
+              <a:rPr lang="en-US"/>
               <a:t>Click to edit Master text styles</a:t>
             </a:r>
           </a:p>
           <a:p>
             <a:pPr lvl="1"/>
             <a:r>
-              <a:rPr lang="en-US" smtClean="0"/>
+              <a:rPr lang="en-US"/>
               <a:t>Second level</a:t>
             </a:r>
           </a:p>
           <a:p>
             <a:pPr lvl="2"/>
             <a:r>
-              <a:rPr lang="en-US" smtClean="0"/>
+              <a:rPr lang="en-US"/>
               <a:t>Third level</a:t>
             </a:r>
           </a:p>
           <a:p>
             <a:pPr lvl="3"/>
             <a:r>
-              <a:rPr lang="en-US" smtClean="0"/>
+              <a:rPr lang="en-US"/>
               <a:t>Fourth level</a:t>
             </a:r>
           </a:p>
           <a:p>
             <a:pPr lvl="4"/>
             <a:r>
-              <a:rPr lang="en-US" smtClean="0"/>
+              <a:rPr lang="en-US"/>
               <a:t>Fifth level</a:t>
             </a:r>
-            <a:endParaRPr lang="en-US"/>
           </a:p>
         </p:txBody>
       </p:sp>
@@ -1780,7 +1781,7 @@
           <a:p>
             <a:fld id="{5BCAD085-E8A6-8845-BD4E-CB4CCA059FC4}" type="datetimeFigureOut">
               <a:rPr lang="en-US" smtClean="0"/>
-              <a:t>1/27/13</a:t>
+              <a:t>7/1/2026</a:t>
             </a:fld>
             <a:endParaRPr lang="en-US"/>
           </a:p>
@@ -1874,10 +1875,9 @@
           <a:lstStyle/>
           <a:p>
             <a:r>
-              <a:rPr lang="en-US" smtClean="0"/>
+              <a:rPr lang="en-US"/>
               <a:t>Click to edit Master title style</a:t>
             </a:r>
-            <a:endParaRPr lang="en-US"/>
           </a:p>
         </p:txBody>
       </p:sp>
@@ -1898,7 +1898,7 @@
           <a:p>
             <a:fld id="{5BCAD085-E8A6-8845-BD4E-CB4CCA059FC4}" type="datetimeFigureOut">
               <a:rPr lang="en-US" smtClean="0"/>
-              <a:t>1/27/13</a:t>
+              <a:t>7/1/2026</a:t>
             </a:fld>
             <a:endParaRPr lang="en-US"/>
           </a:p>
@@ -1993,7 +1993,7 @@
           <a:p>
             <a:fld id="{5BCAD085-E8A6-8845-BD4E-CB4CCA059FC4}" type="datetimeFigureOut">
               <a:rPr lang="en-US" smtClean="0"/>
-              <a:t>1/27/13</a:t>
+              <a:t>7/1/2026</a:t>
             </a:fld>
             <a:endParaRPr lang="en-US"/>
           </a:p>
@@ -2096,10 +2096,9 @@
           </a:lstStyle>
           <a:p>
             <a:r>
-              <a:rPr lang="en-US" smtClean="0"/>
+              <a:rPr lang="en-US"/>
               <a:t>Click to edit Master title style</a:t>
             </a:r>
-            <a:endParaRPr lang="en-US"/>
           </a:p>
         </p:txBody>
       </p:sp>
@@ -2153,38 +2152,37 @@
           <a:p>
             <a:pPr lvl="0"/>
             <a:r>
-              <a:rPr lang="en-US" smtClean="0"/>
+              <a:rPr lang="en-US"/>
               <a:t>Click to edit Master text styles</a:t>
             </a:r>
           </a:p>
           <a:p>
             <a:pPr lvl="1"/>
             <a:r>
-              <a:rPr lang="en-US" smtClean="0"/>
+              <a:rPr lang="en-US"/>
               <a:t>Second level</a:t>
             </a:r>
           </a:p>
           <a:p>
             <a:pPr lvl="2"/>
             <a:r>
-              <a:rPr lang="en-US" smtClean="0"/>
+              <a:rPr lang="en-US"/>
               <a:t>Third level</a:t>
             </a:r>
           </a:p>
           <a:p>
             <a:pPr lvl="3"/>
             <a:r>
-              <a:rPr lang="en-US" smtClean="0"/>
+              <a:rPr lang="en-US"/>
               <a:t>Fourth level</a:t>
             </a:r>
           </a:p>
           <a:p>
             <a:pPr lvl="4"/>
             <a:r>
-              <a:rPr lang="en-US" smtClean="0"/>
+              <a:rPr lang="en-US"/>
               <a:t>Fifth level</a:t>
             </a:r>
-            <a:endParaRPr lang="en-US"/>
           </a:p>
         </p:txBody>
       </p:sp>
@@ -2247,7 +2245,7 @@
           <a:p>
             <a:pPr lvl="0"/>
             <a:r>
-              <a:rPr lang="en-US" smtClean="0"/>
+              <a:rPr lang="en-US"/>
               <a:t>Click to edit Master text styles</a:t>
             </a:r>
           </a:p>
@@ -2270,7 +2268,7 @@
           <a:p>
             <a:fld id="{5BCAD085-E8A6-8845-BD4E-CB4CCA059FC4}" type="datetimeFigureOut">
               <a:rPr lang="en-US" smtClean="0"/>
-              <a:t>1/27/13</a:t>
+              <a:t>7/1/2026</a:t>
             </a:fld>
             <a:endParaRPr lang="en-US"/>
           </a:p>
@@ -2373,10 +2371,9 @@
           </a:lstStyle>
           <a:p>
             <a:r>
-              <a:rPr lang="en-US" smtClean="0"/>
+              <a:rPr lang="en-US"/>
               <a:t>Click to edit Master title style</a:t>
             </a:r>
-            <a:endParaRPr lang="en-US"/>
           </a:p>
         </p:txBody>
       </p:sp>
@@ -2500,7 +2497,7 @@
           <a:p>
             <a:pPr lvl="0"/>
             <a:r>
-              <a:rPr lang="en-US" smtClean="0"/>
+              <a:rPr lang="en-US"/>
               <a:t>Click to edit Master text styles</a:t>
             </a:r>
           </a:p>
@@ -2523,7 +2520,7 @@
           <a:p>
             <a:fld id="{5BCAD085-E8A6-8845-BD4E-CB4CCA059FC4}" type="datetimeFigureOut">
               <a:rPr lang="en-US" smtClean="0"/>
-              <a:t>1/27/13</a:t>
+              <a:t>7/1/2026</a:t>
             </a:fld>
             <a:endParaRPr lang="en-US"/>
           </a:p>
@@ -2632,10 +2629,9 @@
           <a:lstStyle/>
           <a:p>
             <a:r>
-              <a:rPr lang="en-US" smtClean="0"/>
+              <a:rPr lang="en-US"/>
               <a:t>Click to edit Master title style</a:t>
             </a:r>
-            <a:endParaRPr lang="en-US"/>
           </a:p>
         </p:txBody>
       </p:sp>
@@ -2666,38 +2662,37 @@
           <a:p>
             <a:pPr lvl="0"/>
             <a:r>
-              <a:rPr lang="en-US" smtClean="0"/>
+              <a:rPr lang="en-US"/>
               <a:t>Click to edit Master text styles</a:t>
             </a:r>
           </a:p>
           <a:p>
             <a:pPr lvl="1"/>
             <a:r>
-              <a:rPr lang="en-US" smtClean="0"/>
+              <a:rPr lang="en-US"/>
               <a:t>Second level</a:t>
             </a:r>
           </a:p>
           <a:p>
             <a:pPr lvl="2"/>
             <a:r>
-              <a:rPr lang="en-US" smtClean="0"/>
+              <a:rPr lang="en-US"/>
               <a:t>Third level</a:t>
             </a:r>
           </a:p>
           <a:p>
             <a:pPr lvl="3"/>
             <a:r>
-              <a:rPr lang="en-US" smtClean="0"/>
+              <a:rPr lang="en-US"/>
               <a:t>Fourth level</a:t>
             </a:r>
           </a:p>
           <a:p>
             <a:pPr lvl="4"/>
             <a:r>
-              <a:rPr lang="en-US" smtClean="0"/>
+              <a:rPr lang="en-US"/>
               <a:t>Fifth level</a:t>
             </a:r>
-            <a:endParaRPr lang="en-US"/>
           </a:p>
         </p:txBody>
       </p:sp>
@@ -2736,7 +2731,7 @@
           <a:p>
             <a:fld id="{5BCAD085-E8A6-8845-BD4E-CB4CCA059FC4}" type="datetimeFigureOut">
               <a:rPr lang="en-US" smtClean="0"/>
-              <a:t>1/27/13</a:t>
+              <a:t>7/1/2026</a:t>
             </a:fld>
             <a:endParaRPr lang="en-US"/>
           </a:p>
@@ -3095,7 +3090,7 @@
 </file>
 
 <file path=ppt/slides/slide1.xml><?xml version="1.0" encoding="utf-8"?>
-<p:sld xmlns:a="http://schemas.openxmlformats.org/drawingml/2006/main" xmlns:p="http://schemas.openxmlformats.org/presentationml/2006/main" xmlns:r="http://schemas.openxmlformats.org/officeDocument/2006/relationships">
+<p:sld xmlns:a="http://schemas.openxmlformats.org/drawingml/2006/main" xmlns:r="http://schemas.openxmlformats.org/officeDocument/2006/relationships" xmlns:p="http://schemas.openxmlformats.org/presentationml/2006/main">
   <p:cSld>
     <p:spTree>
       <p:nvGrpSpPr>
@@ -3103,7 +3098,14 @@
         <p:cNvGrpSpPr/>
         <p:nvPr/>
       </p:nvGrpSpPr>
-      <p:grpSpPr/>
+      <p:grpSpPr>
+        <a:xfrm>
+          <a:off x="0" y="0"/>
+          <a:ext cx="0" cy="0"/>
+          <a:chOff x="0" y="0"/>
+          <a:chExt cx="0" cy="0"/>
+        </a:xfrm>
+      </p:grpSpPr>
       <p:sp>
         <p:nvSpPr>
           <p:cNvPr id="2" name="Rectangle 1"/>
@@ -3145,6 +3147,7 @@
           <a:lstStyle/>
           <a:p>
             <a:pPr algn="ctr"/>
+            <a:endParaRPr/>
           </a:p>
         </p:txBody>
       </p:sp>
@@ -3189,6 +3192,7 @@
           <a:lstStyle/>
           <a:p>
             <a:pPr algn="ctr"/>
+            <a:endParaRPr/>
           </a:p>
         </p:txBody>
       </p:sp>
@@ -3201,7 +3205,7 @@
         <p:spPr>
           <a:xfrm>
             <a:off x="822960" y="1371600"/>
-            <a:ext cx="10515600" cy="914400"/>
+            <a:ext cx="3811236" cy="369332"/>
           </a:xfrm>
           <a:prstGeom prst="rect">
             <a:avLst/>
@@ -3222,7 +3226,20 @@
               </a:defRPr>
             </a:pPr>
             <a:r>
-              <a:t>M.Tech. (Online) — Artificial Intelligence</a:t>
+              <a:rPr dirty="0" err="1"/>
+              <a:t>M.Tech</a:t>
+            </a:r>
+            <a:r>
+              <a:rPr dirty="0"/>
+              <a:t>. (Online) </a:t>
+            </a:r>
+            <a:r>
+              <a:rPr lang="en-US" dirty="0"/>
+              <a:t>-</a:t>
+            </a:r>
+            <a:r>
+              <a:rPr dirty="0"/>
+              <a:t> Artificial Intelligence</a:t>
             </a:r>
           </a:p>
         </p:txBody>
@@ -3283,7 +3300,7 @@
         <p:spPr>
           <a:xfrm>
             <a:off x="822960" y="4480560"/>
-            <a:ext cx="10515600" cy="1463040"/>
+            <a:ext cx="5760038" cy="1200329"/>
           </a:xfrm>
           <a:prstGeom prst="rect">
             <a:avLst/>
@@ -3307,7 +3324,16 @@
               </a:defRPr>
             </a:pPr>
             <a:r>
-              <a:t>Midterm Evaluation &amp; Demo — Phase 1 + Phase 2 Progress</a:t>
+              <a:rPr dirty="0"/>
+              <a:t>Midterm Evaluation </a:t>
+            </a:r>
+            <a:r>
+              <a:rPr lang="en-US" dirty="0"/>
+              <a:t>-</a:t>
+            </a:r>
+            <a:r>
+              <a:rPr dirty="0"/>
+              <a:t> Phase 1 + Phase 2 Progress</a:t>
             </a:r>
           </a:p>
           <a:p>
@@ -3322,7 +3348,28 @@
               </a:defRPr>
             </a:pPr>
             <a:r>
-              <a:t>Rajib Roy  |  Student No. 24459  |  IISc M.Tech (AI)</a:t>
+              <a:rPr dirty="0"/>
+              <a:t>Rajib Roy  |  Student No. 24459  |  IISc</a:t>
+            </a:r>
+            <a:r>
+              <a:rPr lang="en-US" dirty="0"/>
+              <a:t>, Bengaluru</a:t>
+            </a:r>
+            <a:r>
+              <a:rPr dirty="0"/>
+              <a:t> </a:t>
+            </a:r>
+            <a:r>
+              <a:rPr lang="en-US" dirty="0"/>
+              <a:t>| </a:t>
+            </a:r>
+            <a:r>
+              <a:rPr dirty="0" err="1"/>
+              <a:t>M.Tech</a:t>
+            </a:r>
+            <a:r>
+              <a:rPr dirty="0"/>
+              <a:t> (AI)</a:t>
             </a:r>
           </a:p>
           <a:p>
@@ -3337,8 +3384,22 @@
               </a:defRPr>
             </a:pPr>
             <a:r>
-              <a:t>Internal Guide: Dr. Anil Rahate, Wipro Ltd   |   IISc Mentor: Prof. C. S. Seelamantula</a:t>
-            </a:r>
+              <a:rPr dirty="0"/>
+              <a:t>Internal Guide: Dr. Anil </a:t>
+            </a:r>
+            <a:r>
+              <a:rPr dirty="0" err="1"/>
+              <a:t>Rahate</a:t>
+            </a:r>
+            <a:r>
+              <a:rPr dirty="0"/>
+              <a:t>, Wipro Ltd   |   IISc Mentor: Prof. C. S. </a:t>
+            </a:r>
+            <a:r>
+              <a:rPr dirty="0" err="1"/>
+              <a:t>Seelamantula</a:t>
+            </a:r>
+            <a:endParaRPr dirty="0"/>
           </a:p>
           <a:p>
             <a:pPr>
@@ -3352,6 +3413,7 @@
               </a:defRPr>
             </a:pPr>
             <a:r>
+              <a:rPr dirty="0"/>
               <a:t>July 2026</a:t>
             </a:r>
           </a:p>
@@ -3366,7 +3428,7 @@
 </file>
 
 <file path=ppt/slides/slide10.xml><?xml version="1.0" encoding="utf-8"?>
-<p:sld xmlns:a="http://schemas.openxmlformats.org/drawingml/2006/main" xmlns:p="http://schemas.openxmlformats.org/presentationml/2006/main" xmlns:r="http://schemas.openxmlformats.org/officeDocument/2006/relationships">
+<p:sld xmlns:a="http://schemas.openxmlformats.org/drawingml/2006/main" xmlns:r="http://schemas.openxmlformats.org/officeDocument/2006/relationships" xmlns:p="http://schemas.openxmlformats.org/presentationml/2006/main">
   <p:cSld>
     <p:spTree>
       <p:nvGrpSpPr>
@@ -3374,7 +3436,14 @@
         <p:cNvGrpSpPr/>
         <p:nvPr/>
       </p:nvGrpSpPr>
-      <p:grpSpPr/>
+      <p:grpSpPr>
+        <a:xfrm>
+          <a:off x="0" y="0"/>
+          <a:ext cx="0" cy="0"/>
+          <a:chOff x="0" y="0"/>
+          <a:chExt cx="0" cy="0"/>
+        </a:xfrm>
+      </p:grpSpPr>
       <p:sp>
         <p:nvSpPr>
           <p:cNvPr id="2" name="Rectangle 1"/>
@@ -3416,6 +3485,7 @@
           <a:lstStyle/>
           <a:p>
             <a:pPr algn="ctr"/>
+            <a:endParaRPr/>
           </a:p>
         </p:txBody>
       </p:sp>
@@ -3460,6 +3530,7 @@
           <a:lstStyle/>
           <a:p>
             <a:pPr algn="ctr"/>
+            <a:endParaRPr/>
           </a:p>
         </p:txBody>
       </p:sp>
@@ -3551,6 +3622,7 @@
           <a:lstStyle/>
           <a:p>
             <a:pPr algn="ctr"/>
+            <a:endParaRPr/>
           </a:p>
         </p:txBody>
       </p:sp>
@@ -3592,7 +3664,7 @@
           </a:fontRef>
         </p:style>
         <p:txBody>
-          <a:bodyPr rtlCol="0" anchor="ctr" wrap="square" lIns="274320" tIns="228600" rIns="228600"/>
+          <a:bodyPr wrap="square" lIns="274320" tIns="228600" rIns="228600" rtlCol="0" anchor="ctr"/>
           <a:lstStyle/>
           <a:p>
             <a:pPr algn="ctr">
@@ -3603,8 +3675,20 @@
               </a:defRPr>
             </a:pPr>
             <a:r>
+              <a:rPr dirty="0"/>
               <a:t>CNN</a:t>
             </a:r>
+            <a:endParaRPr lang="en-IN" dirty="0"/>
+          </a:p>
+          <a:p>
+            <a:pPr algn="ctr">
+              <a:defRPr sz="2000" b="1">
+                <a:solidFill>
+                  <a:srgbClr val="1F4E79"/>
+                </a:solidFill>
+              </a:defRPr>
+            </a:pPr>
+            <a:endParaRPr dirty="0"/>
           </a:p>
           <a:p>
             <a:pPr>
@@ -3621,7 +3705,24 @@
               </a:defRPr>
             </a:pPr>
             <a:r>
-              <a:t>▸ 4 conv blocks: 32→64→128→256 channels, 3×3 kernel, BatchNorm, ReLU, max-pool</a:t>
+              <a:rPr dirty="0"/>
+              <a:t>▸ 4 conv blocks: 32→64→128→256 channels, 3×3 kernel, </a:t>
+            </a:r>
+            <a:r>
+              <a:rPr dirty="0" err="1"/>
+              <a:t>BatchNorm</a:t>
+            </a:r>
+            <a:r>
+              <a:rPr dirty="0"/>
+              <a:t>, </a:t>
+            </a:r>
+            <a:r>
+              <a:rPr dirty="0" err="1"/>
+              <a:t>ReLU</a:t>
+            </a:r>
+            <a:r>
+              <a:rPr dirty="0"/>
+              <a:t>, max-pool</a:t>
             </a:r>
           </a:p>
           <a:p>
@@ -3639,6 +3740,7 @@
               </a:defRPr>
             </a:pPr>
             <a:r>
+              <a:rPr dirty="0"/>
               <a:t>▸ Global average pooling</a:t>
             </a:r>
           </a:p>
@@ -3657,11 +3759,29 @@
               </a:defRPr>
             </a:pPr>
             <a:r>
+              <a:rPr dirty="0"/>
               <a:t>▸ Classifier: 256→128→2, dropout p=0.5</a:t>
             </a:r>
+            <a:endParaRPr lang="en-US" dirty="0"/>
           </a:p>
           <a:p>
             <a:pPr>
+              <a:lnSpc>
+                <a:spcPct val="115000"/>
+              </a:lnSpc>
+              <a:spcAft>
+                <a:spcPts val="800"/>
+              </a:spcAft>
+              <a:defRPr sz="1450">
+                <a:solidFill>
+                  <a:srgbClr val="333333"/>
+                </a:solidFill>
+              </a:defRPr>
+            </a:pPr>
+            <a:endParaRPr dirty="0"/>
+          </a:p>
+          <a:p>
+            <a:pPr algn="ctr">
               <a:spcBef>
                 <a:spcPts val="1000"/>
               </a:spcBef>
@@ -3672,6 +3792,7 @@
               </a:defRPr>
             </a:pPr>
             <a:r>
+              <a:rPr dirty="0"/>
               <a:t>421,954 parameters</a:t>
             </a:r>
           </a:p>
@@ -3715,7 +3836,7 @@
           </a:fontRef>
         </p:style>
         <p:txBody>
-          <a:bodyPr rtlCol="0" anchor="ctr" wrap="square" lIns="274320" tIns="228600" rIns="228600"/>
+          <a:bodyPr wrap="square" lIns="274320" tIns="228600" rIns="228600" rtlCol="0" anchor="ctr"/>
           <a:lstStyle/>
           <a:p>
             <a:pPr algn="ctr">
@@ -3726,8 +3847,20 @@
               </a:defRPr>
             </a:pPr>
             <a:r>
+              <a:rPr dirty="0"/>
               <a:t>CNN-LSTM</a:t>
             </a:r>
+            <a:endParaRPr lang="en-US" dirty="0"/>
+          </a:p>
+          <a:p>
+            <a:pPr algn="ctr">
+              <a:defRPr sz="2000" b="1">
+                <a:solidFill>
+                  <a:srgbClr val="1F4E79"/>
+                </a:solidFill>
+              </a:defRPr>
+            </a:pPr>
+            <a:endParaRPr dirty="0"/>
           </a:p>
           <a:p>
             <a:pPr>
@@ -3744,6 +3877,7 @@
               </a:defRPr>
             </a:pPr>
             <a:r>
+              <a:rPr dirty="0"/>
               <a:t>▸ Same conv front-end, frequency-only pooling (preserves time axis)</a:t>
             </a:r>
           </a:p>
@@ -3762,6 +3896,7 @@
               </a:defRPr>
             </a:pPr>
             <a:r>
+              <a:rPr dirty="0"/>
               <a:t>▸ 2-layer bidirectional LSTM, hidden size 128/direction</a:t>
             </a:r>
           </a:p>
@@ -3780,11 +3915,13 @@
               </a:defRPr>
             </a:pPr>
             <a:r>
+              <a:rPr dirty="0"/>
               <a:t>▸ Same classifier head — explicitly models temporal prosodic dynamics</a:t>
             </a:r>
-          </a:p>
-          <a:p>
-            <a:pPr>
+            <a:endParaRPr lang="en-US" dirty="0"/>
+          </a:p>
+          <a:p>
+            <a:pPr algn="ctr">
               <a:spcBef>
                 <a:spcPts val="1000"/>
               </a:spcBef>
@@ -3795,6 +3932,7 @@
               </a:defRPr>
             </a:pPr>
             <a:r>
+              <a:rPr dirty="0"/>
               <a:t>1,834,498 parameters</a:t>
             </a:r>
           </a:p>
@@ -3809,7 +3947,7 @@
         <p:spPr>
           <a:xfrm>
             <a:off x="731520" y="5989320"/>
-            <a:ext cx="10698480" cy="548640"/>
+            <a:ext cx="9948108" cy="492443"/>
           </a:xfrm>
           <a:prstGeom prst="rect">
             <a:avLst/>
@@ -3830,7 +3968,38 @@
               </a:defRPr>
             </a:pPr>
             <a:r>
-              <a:t>Training: Adam (lr=1e-3), cosine annealing, 50 epochs, weighted cross-entropy, WeightedRandomSampler, mixed precision on RTX 3060 (6.4 GB), early stopping (patience 10)</a:t>
+              <a:rPr dirty="0"/>
+              <a:t>Training: Adam (</a:t>
+            </a:r>
+            <a:r>
+              <a:rPr dirty="0" err="1"/>
+              <a:t>lr</a:t>
+            </a:r>
+            <a:r>
+              <a:rPr dirty="0"/>
+              <a:t>=1e-3), cosine annealing, 50 epochs, weighted cross-entropy, </a:t>
+            </a:r>
+            <a:r>
+              <a:rPr dirty="0" err="1"/>
+              <a:t>WeightedRandomSampler</a:t>
+            </a:r>
+            <a:r>
+              <a:rPr dirty="0"/>
+              <a:t>, mixed precision on RTX 3060 (6.4 GB), </a:t>
+            </a:r>
+            <a:endParaRPr lang="en-US" dirty="0"/>
+          </a:p>
+          <a:p>
+            <a:pPr>
+              <a:defRPr sz="1300" i="1">
+                <a:solidFill>
+                  <a:srgbClr val="333333"/>
+                </a:solidFill>
+              </a:defRPr>
+            </a:pPr>
+            <a:r>
+              <a:rPr dirty="0"/>
+              <a:t>early stopping (patience 10)</a:t>
             </a:r>
           </a:p>
         </p:txBody>
@@ -3844,7 +4013,7 @@
 </file>
 
 <file path=ppt/slides/slide11.xml><?xml version="1.0" encoding="utf-8"?>
-<p:sld xmlns:a="http://schemas.openxmlformats.org/drawingml/2006/main" xmlns:p="http://schemas.openxmlformats.org/presentationml/2006/main" xmlns:r="http://schemas.openxmlformats.org/officeDocument/2006/relationships">
+<p:sld xmlns:a="http://schemas.openxmlformats.org/drawingml/2006/main" xmlns:r="http://schemas.openxmlformats.org/officeDocument/2006/relationships" xmlns:p="http://schemas.openxmlformats.org/presentationml/2006/main">
   <p:cSld>
     <p:spTree>
       <p:nvGrpSpPr>
@@ -3852,7 +4021,14 @@
         <p:cNvGrpSpPr/>
         <p:nvPr/>
       </p:nvGrpSpPr>
-      <p:grpSpPr/>
+      <p:grpSpPr>
+        <a:xfrm>
+          <a:off x="0" y="0"/>
+          <a:ext cx="0" cy="0"/>
+          <a:chOff x="0" y="0"/>
+          <a:chExt cx="0" cy="0"/>
+        </a:xfrm>
+      </p:grpSpPr>
       <p:sp>
         <p:nvSpPr>
           <p:cNvPr id="2" name="Rectangle 1"/>
@@ -3894,6 +4070,7 @@
           <a:lstStyle/>
           <a:p>
             <a:pPr algn="ctr"/>
+            <a:endParaRPr/>
           </a:p>
         </p:txBody>
       </p:sp>
@@ -3938,6 +4115,7 @@
           <a:lstStyle/>
           <a:p>
             <a:pPr algn="ctr"/>
+            <a:endParaRPr/>
           </a:p>
         </p:txBody>
       </p:sp>
@@ -3950,7 +4128,7 @@
         <p:spPr>
           <a:xfrm>
             <a:off x="457200" y="109728"/>
-            <a:ext cx="11277295" cy="822960"/>
+            <a:ext cx="11277295" cy="723275"/>
           </a:xfrm>
           <a:prstGeom prst="rect">
             <a:avLst/>
@@ -3971,6 +4149,7 @@
               </a:defRPr>
             </a:pPr>
             <a:r>
+              <a:rPr dirty="0"/>
               <a:t>CNN VS. CNN-LSTM</a:t>
             </a:r>
           </a:p>
@@ -3983,7 +4162,16 @@
               </a:defRPr>
             </a:pPr>
             <a:r>
-              <a:t>Phase 2: Deep Learning — Convergence</a:t>
+              <a:rPr dirty="0"/>
+              <a:t>Phase 2: Deep Learning </a:t>
+            </a:r>
+            <a:r>
+              <a:rPr lang="en-US" dirty="0"/>
+              <a:t>-</a:t>
+            </a:r>
+            <a:r>
+              <a:rPr dirty="0"/>
+              <a:t> Convergence</a:t>
             </a:r>
           </a:p>
         </p:txBody>
@@ -4029,6 +4217,7 @@
           <a:lstStyle/>
           <a:p>
             <a:pPr algn="ctr"/>
+            <a:endParaRPr/>
           </a:p>
         </p:txBody>
       </p:sp>
@@ -4038,10 +4227,16 @@
           <p:cNvGraphicFramePr>
             <a:graphicFrameLocks noGrp="1"/>
           </p:cNvGraphicFramePr>
-          <p:nvPr/>
+          <p:nvPr>
+            <p:extLst>
+              <p:ext uri="{D42A27DB-BD31-4B8C-83A1-F6EECF244321}">
+                <p14:modId xmlns:p14="http://schemas.microsoft.com/office/powerpoint/2010/main" val="3918950007"/>
+              </p:ext>
+            </p:extLst>
+          </p:nvPr>
         </p:nvGraphicFramePr>
         <p:xfrm>
-          <a:off x="731520" y="1417320"/>
+          <a:off x="731520" y="1285240"/>
           <a:ext cx="10698480" cy="1371600"/>
         </p:xfrm>
         <a:graphic>
@@ -4051,11 +4246,41 @@
                 <a:tableStyleId>{5C22544A-7EE6-4342-B048-85BDC9FD1C3A}</a:tableStyleId>
               </a:tblPr>
               <a:tblGrid>
-                <a:gridCol w="2286000"/>
-                <a:gridCol w="2103120"/>
-                <a:gridCol w="2103120"/>
-                <a:gridCol w="2103120"/>
-                <a:gridCol w="2103120"/>
+                <a:gridCol w="2286000">
+                  <a:extLst>
+                    <a:ext uri="{9D8B030D-6E8A-4147-A177-3AD203B41FA5}">
+                      <a16:colId xmlns:a16="http://schemas.microsoft.com/office/drawing/2014/main" val="20000"/>
+                    </a:ext>
+                  </a:extLst>
+                </a:gridCol>
+                <a:gridCol w="2103120">
+                  <a:extLst>
+                    <a:ext uri="{9D8B030D-6E8A-4147-A177-3AD203B41FA5}">
+                      <a16:colId xmlns:a16="http://schemas.microsoft.com/office/drawing/2014/main" val="20001"/>
+                    </a:ext>
+                  </a:extLst>
+                </a:gridCol>
+                <a:gridCol w="2103120">
+                  <a:extLst>
+                    <a:ext uri="{9D8B030D-6E8A-4147-A177-3AD203B41FA5}">
+                      <a16:colId xmlns:a16="http://schemas.microsoft.com/office/drawing/2014/main" val="20002"/>
+                    </a:ext>
+                  </a:extLst>
+                </a:gridCol>
+                <a:gridCol w="2103120">
+                  <a:extLst>
+                    <a:ext uri="{9D8B030D-6E8A-4147-A177-3AD203B41FA5}">
+                      <a16:colId xmlns:a16="http://schemas.microsoft.com/office/drawing/2014/main" val="20003"/>
+                    </a:ext>
+                  </a:extLst>
+                </a:gridCol>
+                <a:gridCol w="2103120">
+                  <a:extLst>
+                    <a:ext uri="{9D8B030D-6E8A-4147-A177-3AD203B41FA5}">
+                      <a16:colId xmlns:a16="http://schemas.microsoft.com/office/drawing/2014/main" val="20004"/>
+                    </a:ext>
+                  </a:extLst>
+                </a:gridCol>
               </a:tblGrid>
               <a:tr h="457200">
                 <a:tc>
@@ -4173,6 +4398,11 @@
                     </a:solidFill>
                   </a:tcPr>
                 </a:tc>
+                <a:extLst>
+                  <a:ext uri="{0D108BD9-81ED-4DB2-BD59-A6C34878D82A}">
+                    <a16:rowId xmlns:a16="http://schemas.microsoft.com/office/drawing/2014/main" val="10000"/>
+                  </a:ext>
+                </a:extLst>
               </a:tr>
               <a:tr h="457200">
                 <a:tc>
@@ -4290,6 +4520,11 @@
                     </a:solidFill>
                   </a:tcPr>
                 </a:tc>
+                <a:extLst>
+                  <a:ext uri="{0D108BD9-81ED-4DB2-BD59-A6C34878D82A}">
+                    <a16:rowId xmlns:a16="http://schemas.microsoft.com/office/drawing/2014/main" val="10001"/>
+                  </a:ext>
+                </a:extLst>
               </a:tr>
               <a:tr h="457200">
                 <a:tc>
@@ -4397,6 +4632,7 @@
                         </a:defRPr>
                       </a:pPr>
                       <a:r>
+                        <a:rPr dirty="0"/>
                         <a:t>~60 min (RTX 3060)</a:t>
                       </a:r>
                     </a:p>
@@ -4407,6 +4643,11 @@
                     </a:solidFill>
                   </a:tcPr>
                 </a:tc>
+                <a:extLst>
+                  <a:ext uri="{0D108BD9-81ED-4DB2-BD59-A6C34878D82A}">
+                    <a16:rowId xmlns:a16="http://schemas.microsoft.com/office/drawing/2014/main" val="10002"/>
+                  </a:ext>
+                </a:extLst>
               </a:tr>
             </a:tbl>
           </a:graphicData>
@@ -4420,7 +4661,7 @@
         </p:nvSpPr>
         <p:spPr>
           <a:xfrm>
-            <a:off x="731520" y="2926080"/>
+            <a:off x="731520" y="2684272"/>
             <a:ext cx="10698480" cy="822960"/>
           </a:xfrm>
           <a:prstGeom prst="rect">
@@ -4442,6 +4683,7 @@
               </a:defRPr>
             </a:pPr>
             <a:r>
+              <a:rPr dirty="0"/>
               <a:t>CNN-LSTM converges faster to a lower validation EER — explicit temporal modelling via the LSTM captures prosodic artefacts that CNN global average pooling discards.</a:t>
             </a:r>
           </a:p>
@@ -4480,7 +4722,9 @@
               <a:t>Midterm Evaluation — Phase 1 + Phase 2</a:t>
             </a:r>
           </a:p>
-          <a:p/>
+          <a:p>
+            <a:endParaRPr/>
+          </a:p>
         </p:txBody>
       </p:sp>
       <p:pic>
@@ -4499,8 +4743,8 @@
         </p:blipFill>
         <p:spPr>
           <a:xfrm>
-            <a:off x="1463040" y="3108960"/>
-            <a:ext cx="9235440" cy="3930823"/>
+            <a:off x="2551176" y="3095752"/>
+            <a:ext cx="7543800" cy="3210821"/>
           </a:xfrm>
           <a:prstGeom prst="rect">
             <a:avLst/>
@@ -4516,7 +4760,7 @@
 </file>
 
 <file path=ppt/slides/slide12.xml><?xml version="1.0" encoding="utf-8"?>
-<p:sld xmlns:a="http://schemas.openxmlformats.org/drawingml/2006/main" xmlns:p="http://schemas.openxmlformats.org/presentationml/2006/main" xmlns:r="http://schemas.openxmlformats.org/officeDocument/2006/relationships">
+<p:sld xmlns:a="http://schemas.openxmlformats.org/drawingml/2006/main" xmlns:r="http://schemas.openxmlformats.org/officeDocument/2006/relationships" xmlns:p="http://schemas.openxmlformats.org/presentationml/2006/main">
   <p:cSld>
     <p:spTree>
       <p:nvGrpSpPr>
@@ -4524,7 +4768,14 @@
         <p:cNvGrpSpPr/>
         <p:nvPr/>
       </p:nvGrpSpPr>
-      <p:grpSpPr/>
+      <p:grpSpPr>
+        <a:xfrm>
+          <a:off x="0" y="0"/>
+          <a:ext cx="0" cy="0"/>
+          <a:chOff x="0" y="0"/>
+          <a:chExt cx="0" cy="0"/>
+        </a:xfrm>
+      </p:grpSpPr>
       <p:sp>
         <p:nvSpPr>
           <p:cNvPr id="2" name="Rectangle 1"/>
@@ -4566,6 +4817,7 @@
           <a:lstStyle/>
           <a:p>
             <a:pPr algn="ctr"/>
+            <a:endParaRPr/>
           </a:p>
         </p:txBody>
       </p:sp>
@@ -4610,6 +4862,7 @@
           <a:lstStyle/>
           <a:p>
             <a:pPr algn="ctr"/>
+            <a:endParaRPr/>
           </a:p>
         </p:txBody>
       </p:sp>
@@ -4701,6 +4954,7 @@
           <a:lstStyle/>
           <a:p>
             <a:pPr algn="ctr"/>
+            <a:endParaRPr/>
           </a:p>
         </p:txBody>
       </p:sp>
@@ -4720,8 +4974,8 @@
         </p:blipFill>
         <p:spPr>
           <a:xfrm>
-            <a:off x="1097280" y="1371600"/>
-            <a:ext cx="9966960" cy="2020781"/>
+            <a:off x="406474" y="1908048"/>
+            <a:ext cx="11508158" cy="3491992"/>
           </a:xfrm>
           <a:prstGeom prst="rect">
             <a:avLst/>
@@ -4772,7 +5026,7 @@
 </file>
 
 <file path=ppt/slides/slide13.xml><?xml version="1.0" encoding="utf-8"?>
-<p:sld xmlns:a="http://schemas.openxmlformats.org/drawingml/2006/main" xmlns:p="http://schemas.openxmlformats.org/presentationml/2006/main" xmlns:r="http://schemas.openxmlformats.org/officeDocument/2006/relationships">
+<p:sld xmlns:a="http://schemas.openxmlformats.org/drawingml/2006/main" xmlns:r="http://schemas.openxmlformats.org/officeDocument/2006/relationships" xmlns:p="http://schemas.openxmlformats.org/presentationml/2006/main">
   <p:cSld>
     <p:spTree>
       <p:nvGrpSpPr>
@@ -4780,7 +5034,14 @@
         <p:cNvGrpSpPr/>
         <p:nvPr/>
       </p:nvGrpSpPr>
-      <p:grpSpPr/>
+      <p:grpSpPr>
+        <a:xfrm>
+          <a:off x="0" y="0"/>
+          <a:ext cx="0" cy="0"/>
+          <a:chOff x="0" y="0"/>
+          <a:chExt cx="0" cy="0"/>
+        </a:xfrm>
+      </p:grpSpPr>
       <p:sp>
         <p:nvSpPr>
           <p:cNvPr id="2" name="Rectangle 1"/>
@@ -4822,6 +5083,7 @@
           <a:lstStyle/>
           <a:p>
             <a:pPr algn="ctr"/>
+            <a:endParaRPr/>
           </a:p>
         </p:txBody>
       </p:sp>
@@ -4866,6 +5128,7 @@
           <a:lstStyle/>
           <a:p>
             <a:pPr algn="ctr"/>
+            <a:endParaRPr/>
           </a:p>
         </p:txBody>
       </p:sp>
@@ -4957,6 +5220,7 @@
           <a:lstStyle/>
           <a:p>
             <a:pPr algn="ctr"/>
+            <a:endParaRPr/>
           </a:p>
         </p:txBody>
       </p:sp>
@@ -4992,8 +5256,8 @@
         </p:nvSpPr>
         <p:spPr>
           <a:xfrm>
-            <a:off x="731520" y="6080760"/>
-            <a:ext cx="10698480" cy="640080"/>
+            <a:off x="731520" y="5620120"/>
+            <a:ext cx="10698480" cy="715581"/>
           </a:xfrm>
           <a:prstGeom prst="rect">
             <a:avLst/>
@@ -5014,7 +5278,44 @@
               </a:defRPr>
             </a:pPr>
             <a:r>
-              <a:t>SVM degrades fastest under noise (EER ≈0.45 at 5 dB SNR)  ·  Gradient Boosting is most noise-robust (flattens at ≈0.33 below 15 dB)  ·  G.711 alone degrades all models only to EER 0.05–0.08 → noise is the bigger deployment risk, not codec compression.</a:t>
+              <a:rPr dirty="0"/>
+              <a:t>SVM degrades fastest under noise (EER ≈0.45 at 5 dB SNR) </a:t>
+            </a:r>
+            <a:endParaRPr lang="en-US" dirty="0"/>
+          </a:p>
+          <a:p>
+            <a:pPr>
+              <a:defRPr sz="1350">
+                <a:solidFill>
+                  <a:srgbClr val="333333"/>
+                </a:solidFill>
+              </a:defRPr>
+            </a:pPr>
+            <a:r>
+              <a:rPr dirty="0"/>
+              <a:t>Gradient Boosting is most noise-robust (flattens at ≈0.33 below 15 dB) </a:t>
+            </a:r>
+            <a:endParaRPr lang="en-US" dirty="0"/>
+          </a:p>
+          <a:p>
+            <a:pPr>
+              <a:defRPr sz="1350">
+                <a:solidFill>
+                  <a:srgbClr val="333333"/>
+                </a:solidFill>
+              </a:defRPr>
+            </a:pPr>
+            <a:r>
+              <a:rPr dirty="0"/>
+              <a:t>G.711 alone degrades all models only to EER 0.05</a:t>
+            </a:r>
+            <a:r>
+              <a:rPr lang="en-US" dirty="0"/>
+              <a:t>-</a:t>
+            </a:r>
+            <a:r>
+              <a:rPr dirty="0"/>
+              <a:t>0.08 → noise is the bigger deployment risk, not codec compression.</a:t>
             </a:r>
           </a:p>
         </p:txBody>
@@ -5028,7 +5329,7 @@
 </file>
 
 <file path=ppt/slides/slide14.xml><?xml version="1.0" encoding="utf-8"?>
-<p:sld xmlns:a="http://schemas.openxmlformats.org/drawingml/2006/main" xmlns:p="http://schemas.openxmlformats.org/presentationml/2006/main" xmlns:r="http://schemas.openxmlformats.org/officeDocument/2006/relationships">
+<p:sld xmlns:a="http://schemas.openxmlformats.org/drawingml/2006/main" xmlns:r="http://schemas.openxmlformats.org/officeDocument/2006/relationships" xmlns:p="http://schemas.openxmlformats.org/presentationml/2006/main">
   <p:cSld>
     <p:spTree>
       <p:nvGrpSpPr>
@@ -5036,7 +5337,14 @@
         <p:cNvGrpSpPr/>
         <p:nvPr/>
       </p:nvGrpSpPr>
-      <p:grpSpPr/>
+      <p:grpSpPr>
+        <a:xfrm>
+          <a:off x="0" y="0"/>
+          <a:ext cx="0" cy="0"/>
+          <a:chOff x="0" y="0"/>
+          <a:chExt cx="0" cy="0"/>
+        </a:xfrm>
+      </p:grpSpPr>
       <p:sp>
         <p:nvSpPr>
           <p:cNvPr id="2" name="Rectangle 1"/>
@@ -5078,6 +5386,7 @@
           <a:lstStyle/>
           <a:p>
             <a:pPr algn="ctr"/>
+            <a:endParaRPr/>
           </a:p>
         </p:txBody>
       </p:sp>
@@ -5122,6 +5431,7 @@
           <a:lstStyle/>
           <a:p>
             <a:pPr algn="ctr"/>
+            <a:endParaRPr/>
           </a:p>
         </p:txBody>
       </p:sp>
@@ -5134,7 +5444,7 @@
         <p:spPr>
           <a:xfrm>
             <a:off x="457200" y="109728"/>
-            <a:ext cx="11277295" cy="822960"/>
+            <a:ext cx="11277295" cy="723275"/>
           </a:xfrm>
           <a:prstGeom prst="rect">
             <a:avLst/>
@@ -5155,6 +5465,7 @@
               </a:defRPr>
             </a:pPr>
             <a:r>
+              <a:rPr dirty="0"/>
               <a:t>FULL COMPARISON ACROSS EVALUATION CONDITIONS</a:t>
             </a:r>
           </a:p>
@@ -5167,7 +5478,16 @@
               </a:defRPr>
             </a:pPr>
             <a:r>
-              <a:t>Consolidated Results — All Models</a:t>
+              <a:rPr dirty="0"/>
+              <a:t>Consolidated Results </a:t>
+            </a:r>
+            <a:r>
+              <a:rPr lang="en-US" dirty="0"/>
+              <a:t>-</a:t>
+            </a:r>
+            <a:r>
+              <a:rPr dirty="0"/>
+              <a:t> All Models</a:t>
             </a:r>
           </a:p>
         </p:txBody>
@@ -5213,6 +5533,7 @@
           <a:lstStyle/>
           <a:p>
             <a:pPr algn="ctr"/>
+            <a:endParaRPr/>
           </a:p>
         </p:txBody>
       </p:sp>
@@ -5222,11 +5543,17 @@
           <p:cNvGraphicFramePr>
             <a:graphicFrameLocks noGrp="1"/>
           </p:cNvGraphicFramePr>
-          <p:nvPr/>
+          <p:nvPr>
+            <p:extLst>
+              <p:ext uri="{D42A27DB-BD31-4B8C-83A1-F6EECF244321}">
+                <p14:modId xmlns:p14="http://schemas.microsoft.com/office/powerpoint/2010/main" val="890709630"/>
+              </p:ext>
+            </p:extLst>
+          </p:nvPr>
         </p:nvGraphicFramePr>
         <p:xfrm>
-          <a:off x="731520" y="1417320"/>
-          <a:ext cx="10424160" cy="5029200"/>
+          <a:off x="655167" y="1266053"/>
+          <a:ext cx="10424160" cy="4211207"/>
         </p:xfrm>
         <a:graphic>
           <a:graphicData uri="http://schemas.openxmlformats.org/drawingml/2006/table">
@@ -5235,14 +5562,50 @@
                 <a:tableStyleId>{5C22544A-7EE6-4342-B048-85BDC9FD1C3A}</a:tableStyleId>
               </a:tblPr>
               <a:tblGrid>
-                <a:gridCol w="2194560"/>
-                <a:gridCol w="1828800"/>
-                <a:gridCol w="1600200"/>
-                <a:gridCol w="1600200"/>
-                <a:gridCol w="1600200"/>
-                <a:gridCol w="1600200"/>
+                <a:gridCol w="2194560">
+                  <a:extLst>
+                    <a:ext uri="{9D8B030D-6E8A-4147-A177-3AD203B41FA5}">
+                      <a16:colId xmlns:a16="http://schemas.microsoft.com/office/drawing/2014/main" val="20000"/>
+                    </a:ext>
+                  </a:extLst>
+                </a:gridCol>
+                <a:gridCol w="1828800">
+                  <a:extLst>
+                    <a:ext uri="{9D8B030D-6E8A-4147-A177-3AD203B41FA5}">
+                      <a16:colId xmlns:a16="http://schemas.microsoft.com/office/drawing/2014/main" val="20001"/>
+                    </a:ext>
+                  </a:extLst>
+                </a:gridCol>
+                <a:gridCol w="1600200">
+                  <a:extLst>
+                    <a:ext uri="{9D8B030D-6E8A-4147-A177-3AD203B41FA5}">
+                      <a16:colId xmlns:a16="http://schemas.microsoft.com/office/drawing/2014/main" val="20002"/>
+                    </a:ext>
+                  </a:extLst>
+                </a:gridCol>
+                <a:gridCol w="1600200">
+                  <a:extLst>
+                    <a:ext uri="{9D8B030D-6E8A-4147-A177-3AD203B41FA5}">
+                      <a16:colId xmlns:a16="http://schemas.microsoft.com/office/drawing/2014/main" val="20003"/>
+                    </a:ext>
+                  </a:extLst>
+                </a:gridCol>
+                <a:gridCol w="1600200">
+                  <a:extLst>
+                    <a:ext uri="{9D8B030D-6E8A-4147-A177-3AD203B41FA5}">
+                      <a16:colId xmlns:a16="http://schemas.microsoft.com/office/drawing/2014/main" val="20004"/>
+                    </a:ext>
+                  </a:extLst>
+                </a:gridCol>
+                <a:gridCol w="1600200">
+                  <a:extLst>
+                    <a:ext uri="{9D8B030D-6E8A-4147-A177-3AD203B41FA5}">
+                      <a16:colId xmlns:a16="http://schemas.microsoft.com/office/drawing/2014/main" val="20005"/>
+                    </a:ext>
+                  </a:extLst>
+                </a:gridCol>
               </a:tblGrid>
-              <a:tr h="457200">
+              <a:tr h="382837">
                 <a:tc>
                   <a:txBody>
                     <a:bodyPr/>
@@ -5381,8 +5744,13 @@
                     </a:solidFill>
                   </a:tcPr>
                 </a:tc>
+                <a:extLst>
+                  <a:ext uri="{0D108BD9-81ED-4DB2-BD59-A6C34878D82A}">
+                    <a16:rowId xmlns:a16="http://schemas.microsoft.com/office/drawing/2014/main" val="10000"/>
+                  </a:ext>
+                </a:extLst>
               </a:tr>
-              <a:tr h="457200">
+              <a:tr h="382837">
                 <a:tc>
                   <a:txBody>
                     <a:bodyPr/>
@@ -5521,8 +5889,13 @@
                     </a:solidFill>
                   </a:tcPr>
                 </a:tc>
+                <a:extLst>
+                  <a:ext uri="{0D108BD9-81ED-4DB2-BD59-A6C34878D82A}">
+                    <a16:rowId xmlns:a16="http://schemas.microsoft.com/office/drawing/2014/main" val="10001"/>
+                  </a:ext>
+                </a:extLst>
               </a:tr>
-              <a:tr h="457200">
+              <a:tr h="382837">
                 <a:tc>
                   <a:txBody>
                     <a:bodyPr/>
@@ -5661,8 +6034,13 @@
                     </a:solidFill>
                   </a:tcPr>
                 </a:tc>
+                <a:extLst>
+                  <a:ext uri="{0D108BD9-81ED-4DB2-BD59-A6C34878D82A}">
+                    <a16:rowId xmlns:a16="http://schemas.microsoft.com/office/drawing/2014/main" val="10002"/>
+                  </a:ext>
+                </a:extLst>
               </a:tr>
-              <a:tr h="457200">
+              <a:tr h="382837">
                 <a:tc>
                   <a:txBody>
                     <a:bodyPr/>
@@ -5801,8 +6179,13 @@
                     </a:solidFill>
                   </a:tcPr>
                 </a:tc>
+                <a:extLst>
+                  <a:ext uri="{0D108BD9-81ED-4DB2-BD59-A6C34878D82A}">
+                    <a16:rowId xmlns:a16="http://schemas.microsoft.com/office/drawing/2014/main" val="10003"/>
+                  </a:ext>
+                </a:extLst>
               </a:tr>
-              <a:tr h="457200">
+              <a:tr h="382837">
                 <a:tc>
                   <a:txBody>
                     <a:bodyPr/>
@@ -5941,8 +6324,13 @@
                     </a:solidFill>
                   </a:tcPr>
                 </a:tc>
+                <a:extLst>
+                  <a:ext uri="{0D108BD9-81ED-4DB2-BD59-A6C34878D82A}">
+                    <a16:rowId xmlns:a16="http://schemas.microsoft.com/office/drawing/2014/main" val="10004"/>
+                  </a:ext>
+                </a:extLst>
               </a:tr>
-              <a:tr h="457200">
+              <a:tr h="382837">
                 <a:tc>
                   <a:txBody>
                     <a:bodyPr/>
@@ -6081,8 +6469,13 @@
                     </a:solidFill>
                   </a:tcPr>
                 </a:tc>
+                <a:extLst>
+                  <a:ext uri="{0D108BD9-81ED-4DB2-BD59-A6C34878D82A}">
+                    <a16:rowId xmlns:a16="http://schemas.microsoft.com/office/drawing/2014/main" val="10005"/>
+                  </a:ext>
+                </a:extLst>
               </a:tr>
-              <a:tr h="457200">
+              <a:tr h="382837">
                 <a:tc>
                   <a:txBody>
                     <a:bodyPr/>
@@ -6221,8 +6614,13 @@
                     </a:solidFill>
                   </a:tcPr>
                 </a:tc>
+                <a:extLst>
+                  <a:ext uri="{0D108BD9-81ED-4DB2-BD59-A6C34878D82A}">
+                    <a16:rowId xmlns:a16="http://schemas.microsoft.com/office/drawing/2014/main" val="10006"/>
+                  </a:ext>
+                </a:extLst>
               </a:tr>
-              <a:tr h="457200">
+              <a:tr h="382837">
                 <a:tc>
                   <a:txBody>
                     <a:bodyPr/>
@@ -6361,8 +6759,13 @@
                     </a:solidFill>
                   </a:tcPr>
                 </a:tc>
+                <a:extLst>
+                  <a:ext uri="{0D108BD9-81ED-4DB2-BD59-A6C34878D82A}">
+                    <a16:rowId xmlns:a16="http://schemas.microsoft.com/office/drawing/2014/main" val="10007"/>
+                  </a:ext>
+                </a:extLst>
               </a:tr>
-              <a:tr h="457200">
+              <a:tr h="382837">
                 <a:tc>
                   <a:txBody>
                     <a:bodyPr/>
@@ -6501,8 +6904,13 @@
                     </a:solidFill>
                   </a:tcPr>
                 </a:tc>
+                <a:extLst>
+                  <a:ext uri="{0D108BD9-81ED-4DB2-BD59-A6C34878D82A}">
+                    <a16:rowId xmlns:a16="http://schemas.microsoft.com/office/drawing/2014/main" val="10008"/>
+                  </a:ext>
+                </a:extLst>
               </a:tr>
-              <a:tr h="457200">
+              <a:tr h="382837">
                 <a:tc>
                   <a:txBody>
                     <a:bodyPr/>
@@ -6641,8 +7049,13 @@
                     </a:solidFill>
                   </a:tcPr>
                 </a:tc>
+                <a:extLst>
+                  <a:ext uri="{0D108BD9-81ED-4DB2-BD59-A6C34878D82A}">
+                    <a16:rowId xmlns:a16="http://schemas.microsoft.com/office/drawing/2014/main" val="10009"/>
+                  </a:ext>
+                </a:extLst>
               </a:tr>
-              <a:tr h="457200">
+              <a:tr h="382837">
                 <a:tc>
                   <a:txBody>
                     <a:bodyPr/>
@@ -6771,6 +7184,7 @@
                         </a:defRPr>
                       </a:pPr>
                       <a:r>
+                        <a:rPr dirty="0"/>
                         <a:t>0.9967</a:t>
                       </a:r>
                     </a:p>
@@ -6781,6 +7195,11 @@
                     </a:solidFill>
                   </a:tcPr>
                 </a:tc>
+                <a:extLst>
+                  <a:ext uri="{0D108BD9-81ED-4DB2-BD59-A6C34878D82A}">
+                    <a16:rowId xmlns:a16="http://schemas.microsoft.com/office/drawing/2014/main" val="10010"/>
+                  </a:ext>
+                </a:extLst>
               </a:tr>
             </a:tbl>
           </a:graphicData>
@@ -6794,7 +7213,7 @@
         </p:nvSpPr>
         <p:spPr>
           <a:xfrm>
-            <a:off x="731520" y="6583680"/>
+            <a:off x="518007" y="5723695"/>
             <a:ext cx="10698480" cy="822960"/>
           </a:xfrm>
           <a:prstGeom prst="rect">
@@ -6816,7 +7235,16 @@
               </a:defRPr>
             </a:pPr>
             <a:r>
-              <a:t>CNN-LSTM is best overall (EER 0.0035 test, 0.0004 on unseen Edge-TTS). Every model generalises as well as or better than on the standard test set. † Gen. test = held-out Edge-TTS.</a:t>
+              <a:rPr dirty="0"/>
+              <a:t>CNN-LSTM is best overall (EER 0.0035 test, 0.0004 on unseen Edge-TTS). Every model </a:t>
+            </a:r>
+            <a:r>
+              <a:rPr dirty="0" err="1"/>
+              <a:t>generalises</a:t>
+            </a:r>
+            <a:r>
+              <a:rPr dirty="0"/>
+              <a:t> as well as or better than on the standard test set. † Gen. test = held-out Edge-TTS.</a:t>
             </a:r>
           </a:p>
         </p:txBody>
@@ -6854,7 +7282,9 @@
               <a:t>Midterm Evaluation — Phase 1 + Phase 2</a:t>
             </a:r>
           </a:p>
-          <a:p/>
+          <a:p>
+            <a:endParaRPr/>
+          </a:p>
         </p:txBody>
       </p:sp>
     </p:spTree>
@@ -6866,7 +7296,7 @@
 </file>
 
 <file path=ppt/slides/slide15.xml><?xml version="1.0" encoding="utf-8"?>
-<p:sld xmlns:a="http://schemas.openxmlformats.org/drawingml/2006/main" xmlns:p="http://schemas.openxmlformats.org/presentationml/2006/main" xmlns:r="http://schemas.openxmlformats.org/officeDocument/2006/relationships">
+<p:sld xmlns:a="http://schemas.openxmlformats.org/drawingml/2006/main" xmlns:r="http://schemas.openxmlformats.org/officeDocument/2006/relationships" xmlns:p="http://schemas.openxmlformats.org/presentationml/2006/main">
   <p:cSld>
     <p:spTree>
       <p:nvGrpSpPr>
@@ -6874,7 +7304,14 @@
         <p:cNvGrpSpPr/>
         <p:nvPr/>
       </p:nvGrpSpPr>
-      <p:grpSpPr/>
+      <p:grpSpPr>
+        <a:xfrm>
+          <a:off x="0" y="0"/>
+          <a:ext cx="0" cy="0"/>
+          <a:chOff x="0" y="0"/>
+          <a:chExt cx="0" cy="0"/>
+        </a:xfrm>
+      </p:grpSpPr>
       <p:sp>
         <p:nvSpPr>
           <p:cNvPr id="2" name="Rectangle 1"/>
@@ -6916,6 +7353,7 @@
           <a:lstStyle/>
           <a:p>
             <a:pPr algn="ctr"/>
+            <a:endParaRPr/>
           </a:p>
         </p:txBody>
       </p:sp>
@@ -6960,6 +7398,7 @@
           <a:lstStyle/>
           <a:p>
             <a:pPr algn="ctr"/>
+            <a:endParaRPr/>
           </a:p>
         </p:txBody>
       </p:sp>
@@ -7051,6 +7490,7 @@
           <a:lstStyle/>
           <a:p>
             <a:pPr algn="ctr"/>
+            <a:endParaRPr/>
           </a:p>
         </p:txBody>
       </p:sp>
@@ -7092,7 +7532,7 @@
           </a:fontRef>
         </p:style>
         <p:txBody>
-          <a:bodyPr rtlCol="0" anchor="ctr" wrap="square" lIns="274320" tIns="137160"/>
+          <a:bodyPr wrap="square" lIns="274320" tIns="137160" rtlCol="0" anchor="ctr"/>
           <a:lstStyle/>
           <a:p>
             <a:pPr algn="ctr">
@@ -7103,11 +7543,12 @@
               </a:defRPr>
             </a:pPr>
             <a:r>
+              <a:rPr dirty="0"/>
               <a:t>Deep Learning vs. Classical</a:t>
             </a:r>
           </a:p>
           <a:p>
-            <a:pPr>
+            <a:pPr algn="just">
               <a:lnSpc>
                 <a:spcPct val="115000"/>
               </a:lnSpc>
@@ -7121,7 +7562,16 @@
               </a:defRPr>
             </a:pPr>
             <a:r>
-              <a:t>CNN-LSTM wins overall, but SVM (EER 0.0083) is surprisingly competitive — even beating the plain CNN. The value of deep learning here comes specifically from temporal (LSTM) modelling, not convolution alone.</a:t>
+              <a:rPr dirty="0"/>
+              <a:t>CNN-LSTM wins overall, but SVM (EER 0.0083) is surprisingly competitive </a:t>
+            </a:r>
+            <a:r>
+              <a:rPr lang="en-US" dirty="0"/>
+              <a:t>-</a:t>
+            </a:r>
+            <a:r>
+              <a:rPr dirty="0"/>
+              <a:t> even beating the plain CNN. The value of deep learning here comes specifically from temporal (LSTM) modelling, not convolution alone.</a:t>
             </a:r>
           </a:p>
         </p:txBody>
@@ -7164,7 +7614,7 @@
           </a:fontRef>
         </p:style>
         <p:txBody>
-          <a:bodyPr rtlCol="0" anchor="ctr" wrap="square" lIns="274320" tIns="137160"/>
+          <a:bodyPr wrap="square" lIns="274320" tIns="137160" rtlCol="0" anchor="ctr"/>
           <a:lstStyle/>
           <a:p>
             <a:pPr algn="ctr">
@@ -7175,11 +7625,16 @@
               </a:defRPr>
             </a:pPr>
             <a:r>
-              <a:t>Generalisation is stronger than expected</a:t>
-            </a:r>
-          </a:p>
-          <a:p>
-            <a:pPr>
+              <a:rPr dirty="0" err="1"/>
+              <a:t>Generalisation</a:t>
+            </a:r>
+            <a:r>
+              <a:rPr dirty="0"/>
+              <a:t> is stronger than expected</a:t>
+            </a:r>
+          </a:p>
+          <a:p>
+            <a:pPr algn="just">
               <a:lnSpc>
                 <a:spcPct val="115000"/>
               </a:lnSpc>
@@ -7193,7 +7648,16 @@
               </a:defRPr>
             </a:pPr>
             <a:r>
-              <a:t>Every model does as well or better on the fully unseen Edge-TTS system as on the standard test set — spectral/temporal artefacts appear to be common across neural TTS architectures, not system-specific fingerprints.</a:t>
+              <a:rPr dirty="0"/>
+              <a:t>Every model does as well or better on the fully unseen Edge-TTS system as on the standard test set </a:t>
+            </a:r>
+            <a:r>
+              <a:rPr lang="en-US" dirty="0"/>
+              <a:t>-</a:t>
+            </a:r>
+            <a:r>
+              <a:rPr dirty="0"/>
+              <a:t> spectral/temporal artefacts appear to be common across neural TTS architectures, not system-specific fingerprints.</a:t>
             </a:r>
           </a:p>
         </p:txBody>
@@ -7236,7 +7700,7 @@
           </a:fontRef>
         </p:style>
         <p:txBody>
-          <a:bodyPr rtlCol="0" anchor="ctr" wrap="square" lIns="274320" tIns="137160"/>
+          <a:bodyPr wrap="square" lIns="274320" tIns="137160" rtlCol="0" anchor="ctr"/>
           <a:lstStyle/>
           <a:p>
             <a:pPr algn="ctr">
@@ -7247,11 +7711,12 @@
               </a:defRPr>
             </a:pPr>
             <a:r>
+              <a:rPr dirty="0"/>
               <a:t>Noise &gt; Codec Compression as a risk</a:t>
             </a:r>
           </a:p>
           <a:p>
-            <a:pPr>
+            <a:pPr algn="ctr">
               <a:lnSpc>
                 <a:spcPct val="115000"/>
               </a:lnSpc>
@@ -7265,8 +7730,22 @@
               </a:defRPr>
             </a:pPr>
             <a:r>
-              <a:t>G.711 alone only pushes EER to 0.05–0.08. Additive noise pushes classical model EER above 0.3 at low SNR — noise-aware training is the priority for Phase 3 hardening, ahead of further codec-specific work.</a:t>
-            </a:r>
+              <a:rPr dirty="0"/>
+              <a:t>G.711 alone only pushes EER to 0.05</a:t>
+            </a:r>
+            <a:r>
+              <a:rPr lang="en-US" dirty="0"/>
+              <a:t>-</a:t>
+            </a:r>
+            <a:r>
+              <a:rPr dirty="0"/>
+              <a:t>0.08. Additive noise pushes classical model EER above 0.3 at low SNR</a:t>
+            </a:r>
+            <a:r>
+              <a:rPr lang="en-US" dirty="0"/>
+              <a:t>.</a:t>
+            </a:r>
+            <a:endParaRPr dirty="0"/>
           </a:p>
         </p:txBody>
       </p:sp>
@@ -7303,7 +7782,9 @@
               <a:t>Midterm Evaluation — Phase 1 + Phase 2</a:t>
             </a:r>
           </a:p>
-          <a:p/>
+          <a:p>
+            <a:endParaRPr/>
+          </a:p>
         </p:txBody>
       </p:sp>
     </p:spTree>
@@ -7315,7 +7796,7 @@
 </file>
 
 <file path=ppt/slides/slide16.xml><?xml version="1.0" encoding="utf-8"?>
-<p:sld xmlns:a="http://schemas.openxmlformats.org/drawingml/2006/main" xmlns:p="http://schemas.openxmlformats.org/presentationml/2006/main" xmlns:r="http://schemas.openxmlformats.org/officeDocument/2006/relationships">
+<p:sld xmlns:a="http://schemas.openxmlformats.org/drawingml/2006/main" xmlns:r="http://schemas.openxmlformats.org/officeDocument/2006/relationships" xmlns:p="http://schemas.openxmlformats.org/presentationml/2006/main">
   <p:cSld>
     <p:spTree>
       <p:nvGrpSpPr>
@@ -7323,7 +7804,14 @@
         <p:cNvGrpSpPr/>
         <p:nvPr/>
       </p:nvGrpSpPr>
-      <p:grpSpPr/>
+      <p:grpSpPr>
+        <a:xfrm>
+          <a:off x="0" y="0"/>
+          <a:ext cx="0" cy="0"/>
+          <a:chOff x="0" y="0"/>
+          <a:chExt cx="0" cy="0"/>
+        </a:xfrm>
+      </p:grpSpPr>
       <p:sp>
         <p:nvSpPr>
           <p:cNvPr id="2" name="Rectangle 1"/>
@@ -7365,6 +7853,7 @@
           <a:lstStyle/>
           <a:p>
             <a:pPr algn="ctr"/>
+            <a:endParaRPr/>
           </a:p>
         </p:txBody>
       </p:sp>
@@ -7409,6 +7898,7 @@
           <a:lstStyle/>
           <a:p>
             <a:pPr algn="ctr"/>
+            <a:endParaRPr/>
           </a:p>
         </p:txBody>
       </p:sp>
@@ -7500,6 +7990,7 @@
           <a:lstStyle/>
           <a:p>
             <a:pPr algn="ctr"/>
+            <a:endParaRPr/>
           </a:p>
         </p:txBody>
       </p:sp>
@@ -7509,7 +8000,13 @@
           <p:cNvGraphicFramePr>
             <a:graphicFrameLocks noGrp="1"/>
           </p:cNvGraphicFramePr>
-          <p:nvPr/>
+          <p:nvPr>
+            <p:extLst>
+              <p:ext uri="{D42A27DB-BD31-4B8C-83A1-F6EECF244321}">
+                <p14:modId xmlns:p14="http://schemas.microsoft.com/office/powerpoint/2010/main" val="4235803513"/>
+              </p:ext>
+            </p:extLst>
+          </p:nvPr>
         </p:nvGraphicFramePr>
         <p:xfrm>
           <a:off x="731520" y="1463040"/>
@@ -7522,9 +8019,27 @@
                 <a:tableStyleId>{5C22544A-7EE6-4342-B048-85BDC9FD1C3A}</a:tableStyleId>
               </a:tblPr>
               <a:tblGrid>
-                <a:gridCol w="4754880"/>
-                <a:gridCol w="2011680"/>
-                <a:gridCol w="3931920"/>
+                <a:gridCol w="4754880">
+                  <a:extLst>
+                    <a:ext uri="{9D8B030D-6E8A-4147-A177-3AD203B41FA5}">
+                      <a16:colId xmlns:a16="http://schemas.microsoft.com/office/drawing/2014/main" val="20000"/>
+                    </a:ext>
+                  </a:extLst>
+                </a:gridCol>
+                <a:gridCol w="2011680">
+                  <a:extLst>
+                    <a:ext uri="{9D8B030D-6E8A-4147-A177-3AD203B41FA5}">
+                      <a16:colId xmlns:a16="http://schemas.microsoft.com/office/drawing/2014/main" val="20001"/>
+                    </a:ext>
+                  </a:extLst>
+                </a:gridCol>
+                <a:gridCol w="3931920">
+                  <a:extLst>
+                    <a:ext uri="{9D8B030D-6E8A-4147-A177-3AD203B41FA5}">
+                      <a16:colId xmlns:a16="http://schemas.microsoft.com/office/drawing/2014/main" val="20002"/>
+                    </a:ext>
+                  </a:extLst>
+                </a:gridCol>
               </a:tblGrid>
               <a:tr h="502920">
                 <a:tc>
@@ -7596,6 +8111,11 @@
                     </a:solidFill>
                   </a:tcPr>
                 </a:tc>
+                <a:extLst>
+                  <a:ext uri="{0D108BD9-81ED-4DB2-BD59-A6C34878D82A}">
+                    <a16:rowId xmlns:a16="http://schemas.microsoft.com/office/drawing/2014/main" val="10000"/>
+                  </a:ext>
+                </a:extLst>
               </a:tr>
               <a:tr h="502920">
                 <a:tc>
@@ -7667,6 +8187,11 @@
                     </a:solidFill>
                   </a:tcPr>
                 </a:tc>
+                <a:extLst>
+                  <a:ext uri="{0D108BD9-81ED-4DB2-BD59-A6C34878D82A}">
+                    <a16:rowId xmlns:a16="http://schemas.microsoft.com/office/drawing/2014/main" val="10001"/>
+                  </a:ext>
+                </a:extLst>
               </a:tr>
               <a:tr h="502920">
                 <a:tc>
@@ -7705,7 +8230,16 @@
                         </a:defRPr>
                       </a:pPr>
                       <a:r>
-                        <a:t>Aug–Sep 2026</a:t>
+                        <a:rPr dirty="0"/>
+                        <a:t>Aug</a:t>
+                      </a:r>
+                      <a:r>
+                        <a:rPr lang="en-US" dirty="0"/>
+                        <a:t> - </a:t>
+                      </a:r>
+                      <a:r>
+                        <a:rPr dirty="0"/>
+                        <a:t>Sep 2026</a:t>
                       </a:r>
                     </a:p>
                   </a:txBody>
@@ -7738,6 +8272,11 @@
                     </a:solidFill>
                   </a:tcPr>
                 </a:tc>
+                <a:extLst>
+                  <a:ext uri="{0D108BD9-81ED-4DB2-BD59-A6C34878D82A}">
+                    <a16:rowId xmlns:a16="http://schemas.microsoft.com/office/drawing/2014/main" val="10002"/>
+                  </a:ext>
+                </a:extLst>
               </a:tr>
               <a:tr h="502920">
                 <a:tc>
@@ -7776,7 +8315,16 @@
                         </a:defRPr>
                       </a:pPr>
                       <a:r>
-                        <a:t>Sep–Oct 2026</a:t>
+                        <a:rPr dirty="0"/>
+                        <a:t>Sep</a:t>
+                      </a:r>
+                      <a:r>
+                        <a:rPr lang="en-US" dirty="0"/>
+                        <a:t> - </a:t>
+                      </a:r>
+                      <a:r>
+                        <a:rPr dirty="0"/>
+                        <a:t>Oct 2026</a:t>
                       </a:r>
                     </a:p>
                   </a:txBody>
@@ -7809,6 +8357,11 @@
                     </a:solidFill>
                   </a:tcPr>
                 </a:tc>
+                <a:extLst>
+                  <a:ext uri="{0D108BD9-81ED-4DB2-BD59-A6C34878D82A}">
+                    <a16:rowId xmlns:a16="http://schemas.microsoft.com/office/drawing/2014/main" val="10003"/>
+                  </a:ext>
+                </a:extLst>
               </a:tr>
               <a:tr h="502920">
                 <a:tc>
@@ -7847,7 +8400,16 @@
                         </a:defRPr>
                       </a:pPr>
                       <a:r>
-                        <a:t>Oct–Nov 2026</a:t>
+                        <a:rPr dirty="0"/>
+                        <a:t>Oct</a:t>
+                      </a:r>
+                      <a:r>
+                        <a:rPr lang="en-US" dirty="0"/>
+                        <a:t> - </a:t>
+                      </a:r>
+                      <a:r>
+                        <a:rPr dirty="0"/>
+                        <a:t>Nov 2026</a:t>
                       </a:r>
                     </a:p>
                   </a:txBody>
@@ -7870,6 +8432,7 @@
                         </a:defRPr>
                       </a:pPr>
                       <a:r>
+                        <a:rPr dirty="0"/>
                         <a:t>Final report, institute-prescribed format</a:t>
                       </a:r>
                     </a:p>
@@ -7880,6 +8443,11 @@
                     </a:solidFill>
                   </a:tcPr>
                 </a:tc>
+                <a:extLst>
+                  <a:ext uri="{0D108BD9-81ED-4DB2-BD59-A6C34878D82A}">
+                    <a16:rowId xmlns:a16="http://schemas.microsoft.com/office/drawing/2014/main" val="10004"/>
+                  </a:ext>
+                </a:extLst>
               </a:tr>
             </a:tbl>
           </a:graphicData>
@@ -7918,7 +8486,9 @@
               <a:t>Midterm Evaluation — Phase 1 + Phase 2</a:t>
             </a:r>
           </a:p>
-          <a:p/>
+          <a:p>
+            <a:endParaRPr/>
+          </a:p>
         </p:txBody>
       </p:sp>
     </p:spTree>
@@ -7930,7 +8500,7 @@
 </file>
 
 <file path=ppt/slides/slide17.xml><?xml version="1.0" encoding="utf-8"?>
-<p:sld xmlns:a="http://schemas.openxmlformats.org/drawingml/2006/main" xmlns:p="http://schemas.openxmlformats.org/presentationml/2006/main" xmlns:r="http://schemas.openxmlformats.org/officeDocument/2006/relationships">
+<p:sld xmlns:a="http://schemas.openxmlformats.org/drawingml/2006/main" xmlns:r="http://schemas.openxmlformats.org/officeDocument/2006/relationships" xmlns:p="http://schemas.openxmlformats.org/presentationml/2006/main">
   <p:cSld>
     <p:spTree>
       <p:nvGrpSpPr>
@@ -7938,7 +8508,14 @@
         <p:cNvGrpSpPr/>
         <p:nvPr/>
       </p:nvGrpSpPr>
-      <p:grpSpPr/>
+      <p:grpSpPr>
+        <a:xfrm>
+          <a:off x="0" y="0"/>
+          <a:ext cx="0" cy="0"/>
+          <a:chOff x="0" y="0"/>
+          <a:chExt cx="0" cy="0"/>
+        </a:xfrm>
+      </p:grpSpPr>
       <p:sp>
         <p:nvSpPr>
           <p:cNvPr id="2" name="Rectangle 1"/>
@@ -7980,6 +8557,7 @@
           <a:lstStyle/>
           <a:p>
             <a:pPr algn="ctr"/>
+            <a:endParaRPr/>
           </a:p>
         </p:txBody>
       </p:sp>
@@ -8039,7 +8617,7 @@
 </file>
 
 <file path=ppt/slides/slide2.xml><?xml version="1.0" encoding="utf-8"?>
-<p:sld xmlns:a="http://schemas.openxmlformats.org/drawingml/2006/main" xmlns:p="http://schemas.openxmlformats.org/presentationml/2006/main" xmlns:r="http://schemas.openxmlformats.org/officeDocument/2006/relationships">
+<p:sld xmlns:a="http://schemas.openxmlformats.org/drawingml/2006/main" xmlns:r="http://schemas.openxmlformats.org/officeDocument/2006/relationships" xmlns:p="http://schemas.openxmlformats.org/presentationml/2006/main">
   <p:cSld>
     <p:spTree>
       <p:nvGrpSpPr>
@@ -8047,7 +8625,14 @@
         <p:cNvGrpSpPr/>
         <p:nvPr/>
       </p:nvGrpSpPr>
-      <p:grpSpPr/>
+      <p:grpSpPr>
+        <a:xfrm>
+          <a:off x="0" y="0"/>
+          <a:ext cx="0" cy="0"/>
+          <a:chOff x="0" y="0"/>
+          <a:chExt cx="0" cy="0"/>
+        </a:xfrm>
+      </p:grpSpPr>
       <p:sp>
         <p:nvSpPr>
           <p:cNvPr id="2" name="Rectangle 1"/>
@@ -8089,6 +8674,7 @@
           <a:lstStyle/>
           <a:p>
             <a:pPr algn="ctr"/>
+            <a:endParaRPr/>
           </a:p>
         </p:txBody>
       </p:sp>
@@ -8133,6 +8719,7 @@
           <a:lstStyle/>
           <a:p>
             <a:pPr algn="ctr"/>
+            <a:endParaRPr/>
           </a:p>
         </p:txBody>
       </p:sp>
@@ -8224,6 +8811,7 @@
           <a:lstStyle/>
           <a:p>
             <a:pPr algn="ctr"/>
+            <a:endParaRPr/>
           </a:p>
         </p:txBody>
       </p:sp>
@@ -8463,7 +9051,9 @@
               <a:t>Midterm Evaluation — Phase 1 + Phase 2</a:t>
             </a:r>
           </a:p>
-          <a:p/>
+          <a:p>
+            <a:endParaRPr/>
+          </a:p>
         </p:txBody>
       </p:sp>
     </p:spTree>
@@ -8475,7 +9065,7 @@
 </file>
 
 <file path=ppt/slides/slide3.xml><?xml version="1.0" encoding="utf-8"?>
-<p:sld xmlns:a="http://schemas.openxmlformats.org/drawingml/2006/main" xmlns:p="http://schemas.openxmlformats.org/presentationml/2006/main" xmlns:r="http://schemas.openxmlformats.org/officeDocument/2006/relationships">
+<p:sld xmlns:a="http://schemas.openxmlformats.org/drawingml/2006/main" xmlns:r="http://schemas.openxmlformats.org/officeDocument/2006/relationships" xmlns:p="http://schemas.openxmlformats.org/presentationml/2006/main">
   <p:cSld>
     <p:spTree>
       <p:nvGrpSpPr>
@@ -8483,7 +9073,14 @@
         <p:cNvGrpSpPr/>
         <p:nvPr/>
       </p:nvGrpSpPr>
-      <p:grpSpPr/>
+      <p:grpSpPr>
+        <a:xfrm>
+          <a:off x="0" y="0"/>
+          <a:ext cx="0" cy="0"/>
+          <a:chOff x="0" y="0"/>
+          <a:chExt cx="0" cy="0"/>
+        </a:xfrm>
+      </p:grpSpPr>
       <p:sp>
         <p:nvSpPr>
           <p:cNvPr id="2" name="Rectangle 1"/>
@@ -8492,7 +9089,7 @@
         </p:nvSpPr>
         <p:spPr>
           <a:xfrm>
-            <a:off x="0" y="0"/>
+            <a:off x="-1" y="0"/>
             <a:ext cx="12191695" cy="6858000"/>
           </a:xfrm>
           <a:prstGeom prst="rect">
@@ -8525,6 +9122,7 @@
           <a:lstStyle/>
           <a:p>
             <a:pPr algn="ctr"/>
+            <a:endParaRPr/>
           </a:p>
         </p:txBody>
       </p:sp>
@@ -8569,6 +9167,7 @@
           <a:lstStyle/>
           <a:p>
             <a:pPr algn="ctr"/>
+            <a:endParaRPr/>
           </a:p>
         </p:txBody>
       </p:sp>
@@ -8660,6 +9259,7 @@
           <a:lstStyle/>
           <a:p>
             <a:pPr algn="ctr"/>
+            <a:endParaRPr/>
           </a:p>
         </p:txBody>
       </p:sp>
@@ -8671,8 +9271,8 @@
         </p:nvSpPr>
         <p:spPr>
           <a:xfrm>
-            <a:off x="731520" y="1371600"/>
-            <a:ext cx="5486400" cy="4572000"/>
+            <a:off x="731520" y="2103120"/>
+            <a:ext cx="5486400" cy="2929776"/>
           </a:xfrm>
           <a:prstGeom prst="rect">
             <a:avLst/>
@@ -8699,7 +9299,16 @@
               </a:defRPr>
             </a:pPr>
             <a:r>
-              <a:t>▸ Voice authentication is routine in banking IVR / call-centre workflows</a:t>
+              <a:rPr dirty="0"/>
+              <a:t>▸ Voice authentication is routine in banking IVR / call-</a:t>
+            </a:r>
+            <a:r>
+              <a:rPr dirty="0" err="1"/>
+              <a:t>centre</a:t>
+            </a:r>
+            <a:r>
+              <a:rPr dirty="0"/>
+              <a:t> workflows</a:t>
             </a:r>
           </a:p>
           <a:p>
@@ -8717,6 +9326,7 @@
               </a:defRPr>
             </a:pPr>
             <a:r>
+              <a:rPr dirty="0"/>
               <a:t>▸ Neural TTS &amp; voice cloning can now replicate a voice from a few seconds of audio</a:t>
             </a:r>
           </a:p>
@@ -8735,7 +9345,16 @@
               </a:defRPr>
             </a:pPr>
             <a:r>
-              <a:t>▸ Existing voice biometrics were designed against replay attacks — not modern neural TTS</a:t>
+              <a:rPr dirty="0"/>
+              <a:t>▸ Existing voice biometrics were designed against replay attacks </a:t>
+            </a:r>
+            <a:r>
+              <a:rPr lang="en-US" dirty="0"/>
+              <a:t>-</a:t>
+            </a:r>
+            <a:r>
+              <a:rPr dirty="0"/>
+              <a:t> not modern neural TTS</a:t>
             </a:r>
           </a:p>
           <a:p>
@@ -8753,6 +9372,7 @@
               </a:defRPr>
             </a:pPr>
             <a:r>
+              <a:rPr dirty="0"/>
               <a:t>▸ A successful spoof enables fraudulent transfers, identity fraud, social engineering</a:t>
             </a:r>
           </a:p>
@@ -8796,22 +9416,23 @@
           </a:fontRef>
         </p:style>
         <p:txBody>
-          <a:bodyPr rtlCol="0" anchor="ctr" wrap="square" lIns="274320" tIns="228600"/>
+          <a:bodyPr wrap="square" lIns="274320" tIns="228600" rtlCol="0" anchor="ctr"/>
           <a:lstStyle/>
           <a:p>
             <a:pPr algn="ctr">
-              <a:defRPr b="1" sz="2000">
+              <a:defRPr sz="2000" b="1">
                 <a:solidFill>
                   <a:srgbClr val="1F4E79"/>
                 </a:solidFill>
               </a:defRPr>
             </a:pPr>
             <a:r>
+              <a:rPr dirty="0"/>
               <a:t>Goal</a:t>
             </a:r>
           </a:p>
           <a:p>
-            <a:pPr>
+            <a:pPr algn="just">
               <a:spcBef>
                 <a:spcPts val="1000"/>
               </a:spcBef>
@@ -8822,6 +9443,7 @@
               </a:defRPr>
             </a:pPr>
             <a:r>
+              <a:rPr dirty="0"/>
               <a:t>Build and validate an automated pipeline that distinguishes genuine human speech from AI-generated / cloned speech, specifically under banking telephony conditions: short utterances, codec compression, background noise.</a:t>
             </a:r>
           </a:p>
@@ -8860,7 +9482,9 @@
               <a:t>Midterm Evaluation — Phase 1 + Phase 2</a:t>
             </a:r>
           </a:p>
-          <a:p/>
+          <a:p>
+            <a:endParaRPr/>
+          </a:p>
         </p:txBody>
       </p:sp>
     </p:spTree>
@@ -8872,7 +9496,7 @@
 </file>
 
 <file path=ppt/slides/slide4.xml><?xml version="1.0" encoding="utf-8"?>
-<p:sld xmlns:a="http://schemas.openxmlformats.org/drawingml/2006/main" xmlns:p="http://schemas.openxmlformats.org/presentationml/2006/main" xmlns:r="http://schemas.openxmlformats.org/officeDocument/2006/relationships">
+<p:sld xmlns:a="http://schemas.openxmlformats.org/drawingml/2006/main" xmlns:r="http://schemas.openxmlformats.org/officeDocument/2006/relationships" xmlns:p="http://schemas.openxmlformats.org/presentationml/2006/main">
   <p:cSld>
     <p:spTree>
       <p:nvGrpSpPr>
@@ -8880,7 +9504,14 @@
         <p:cNvGrpSpPr/>
         <p:nvPr/>
       </p:nvGrpSpPr>
-      <p:grpSpPr/>
+      <p:grpSpPr>
+        <a:xfrm>
+          <a:off x="0" y="0"/>
+          <a:ext cx="0" cy="0"/>
+          <a:chOff x="0" y="0"/>
+          <a:chExt cx="0" cy="0"/>
+        </a:xfrm>
+      </p:grpSpPr>
       <p:sp>
         <p:nvSpPr>
           <p:cNvPr id="2" name="Rectangle 1"/>
@@ -8922,6 +9553,7 @@
           <a:lstStyle/>
           <a:p>
             <a:pPr algn="ctr"/>
+            <a:endParaRPr/>
           </a:p>
         </p:txBody>
       </p:sp>
@@ -8966,6 +9598,7 @@
           <a:lstStyle/>
           <a:p>
             <a:pPr algn="ctr"/>
+            <a:endParaRPr/>
           </a:p>
         </p:txBody>
       </p:sp>
@@ -9057,6 +9690,7 @@
           <a:lstStyle/>
           <a:p>
             <a:pPr algn="ctr"/>
+            <a:endParaRPr/>
           </a:p>
         </p:txBody>
       </p:sp>
@@ -9102,6 +9736,7 @@
           <a:lstStyle/>
           <a:p>
             <a:pPr algn="ctr"/>
+            <a:endParaRPr/>
           </a:p>
         </p:txBody>
       </p:sp>
@@ -9152,7 +9787,8 @@
               </a:defRPr>
             </a:pPr>
             <a:r>
-              <a:t>RQ1</a:t>
+              <a:rPr dirty="0"/>
+              <a:t>1</a:t>
             </a:r>
           </a:p>
         </p:txBody>
@@ -9165,7 +9801,7 @@
         </p:nvSpPr>
         <p:spPr>
           <a:xfrm>
-            <a:off x="1828800" y="1527048"/>
+            <a:off x="1783080" y="1764792"/>
             <a:ext cx="9418320" cy="868680"/>
           </a:xfrm>
           <a:prstGeom prst="rect">
@@ -9234,6 +9870,7 @@
           <a:lstStyle/>
           <a:p>
             <a:pPr algn="ctr"/>
+            <a:endParaRPr/>
           </a:p>
         </p:txBody>
       </p:sp>
@@ -9284,7 +9921,8 @@
               </a:defRPr>
             </a:pPr>
             <a:r>
-              <a:t>RQ2</a:t>
+              <a:rPr dirty="0"/>
+              <a:t>2</a:t>
             </a:r>
           </a:p>
         </p:txBody>
@@ -9297,7 +9935,7 @@
         </p:nvSpPr>
         <p:spPr>
           <a:xfrm>
-            <a:off x="1828800" y="2734056"/>
+            <a:off x="1805940" y="2871216"/>
             <a:ext cx="9418320" cy="868680"/>
           </a:xfrm>
           <a:prstGeom prst="rect">
@@ -9319,6 +9957,7 @@
               </a:defRPr>
             </a:pPr>
             <a:r>
+              <a:rPr dirty="0"/>
               <a:t>Which acoustic/signal-level properties (spectral shape, phase coherence, prosody) most reliably betray synthetic speech?</a:t>
             </a:r>
           </a:p>
@@ -9366,6 +10005,7 @@
           <a:lstStyle/>
           <a:p>
             <a:pPr algn="ctr"/>
+            <a:endParaRPr/>
           </a:p>
         </p:txBody>
       </p:sp>
@@ -9416,7 +10056,8 @@
               </a:defRPr>
             </a:pPr>
             <a:r>
-              <a:t>RQ3</a:t>
+              <a:rPr dirty="0"/>
+              <a:t>3</a:t>
             </a:r>
           </a:p>
         </p:txBody>
@@ -9429,8 +10070,8 @@
         </p:nvSpPr>
         <p:spPr>
           <a:xfrm>
-            <a:off x="1828800" y="3941064"/>
-            <a:ext cx="9418320" cy="868680"/>
+            <a:off x="1783080" y="4091940"/>
+            <a:ext cx="9418320" cy="323165"/>
           </a:xfrm>
           <a:prstGeom prst="rect">
             <a:avLst/>
@@ -9451,7 +10092,16 @@
               </a:defRPr>
             </a:pPr>
             <a:r>
-              <a:t>How do detection models hold up under banking telephony conditions — short utterances, G.711 codec, ambient noise?</a:t>
+              <a:rPr dirty="0"/>
+              <a:t>How do detection models hold up under banking telephony conditions </a:t>
+            </a:r>
+            <a:r>
+              <a:rPr lang="en-US" dirty="0"/>
+              <a:t>-</a:t>
+            </a:r>
+            <a:r>
+              <a:rPr dirty="0"/>
+              <a:t> short utterances, G.711 codec, ambient noise?</a:t>
             </a:r>
           </a:p>
         </p:txBody>
@@ -9498,6 +10148,7 @@
           <a:lstStyle/>
           <a:p>
             <a:pPr algn="ctr"/>
+            <a:endParaRPr/>
           </a:p>
         </p:txBody>
       </p:sp>
@@ -9548,7 +10199,8 @@
               </a:defRPr>
             </a:pPr>
             <a:r>
-              <a:t>RQ4</a:t>
+              <a:rPr dirty="0"/>
+              <a:t>4</a:t>
             </a:r>
           </a:p>
         </p:txBody>
@@ -9561,7 +10213,7 @@
         </p:nvSpPr>
         <p:spPr>
           <a:xfrm>
-            <a:off x="1828800" y="5148072"/>
+            <a:off x="1783080" y="5422392"/>
             <a:ext cx="9418320" cy="868680"/>
           </a:xfrm>
           <a:prstGeom prst="rect">
@@ -9583,6 +10235,7 @@
               </a:defRPr>
             </a:pPr>
             <a:r>
+              <a:rPr dirty="0"/>
               <a:t>Do deep learning architectures offer a meaningful advantage over classical ML under identical data conditions?</a:t>
             </a:r>
           </a:p>
@@ -9618,10 +10271,21 @@
               </a:defRPr>
             </a:pPr>
             <a:r>
-              <a:t>Midterm Evaluation — Phase 1 + Phase 2</a:t>
-            </a:r>
-          </a:p>
-          <a:p/>
+              <a:rPr dirty="0"/>
+              <a:t>Midterm Evaluation </a:t>
+            </a:r>
+            <a:r>
+              <a:rPr lang="en-IN" dirty="0"/>
+              <a:t>—</a:t>
+            </a:r>
+            <a:r>
+              <a:rPr dirty="0"/>
+              <a:t> Phase 1 + Phase 2</a:t>
+            </a:r>
+          </a:p>
+          <a:p>
+            <a:endParaRPr dirty="0"/>
+          </a:p>
         </p:txBody>
       </p:sp>
     </p:spTree>
@@ -9633,7 +10297,7 @@
 </file>
 
 <file path=ppt/slides/slide5.xml><?xml version="1.0" encoding="utf-8"?>
-<p:sld xmlns:a="http://schemas.openxmlformats.org/drawingml/2006/main" xmlns:p="http://schemas.openxmlformats.org/presentationml/2006/main" xmlns:r="http://schemas.openxmlformats.org/officeDocument/2006/relationships">
+<p:sld xmlns:a="http://schemas.openxmlformats.org/drawingml/2006/main" xmlns:r="http://schemas.openxmlformats.org/officeDocument/2006/relationships" xmlns:p="http://schemas.openxmlformats.org/presentationml/2006/main">
   <p:cSld>
     <p:spTree>
       <p:nvGrpSpPr>
@@ -9641,7 +10305,14 @@
         <p:cNvGrpSpPr/>
         <p:nvPr/>
       </p:nvGrpSpPr>
-      <p:grpSpPr/>
+      <p:grpSpPr>
+        <a:xfrm>
+          <a:off x="0" y="0"/>
+          <a:ext cx="0" cy="0"/>
+          <a:chOff x="0" y="0"/>
+          <a:chExt cx="0" cy="0"/>
+        </a:xfrm>
+      </p:grpSpPr>
       <p:sp>
         <p:nvSpPr>
           <p:cNvPr id="2" name="Rectangle 1"/>
@@ -9683,6 +10354,7 @@
           <a:lstStyle/>
           <a:p>
             <a:pPr algn="ctr"/>
+            <a:endParaRPr/>
           </a:p>
         </p:txBody>
       </p:sp>
@@ -9727,6 +10399,7 @@
           <a:lstStyle/>
           <a:p>
             <a:pPr algn="ctr"/>
+            <a:endParaRPr/>
           </a:p>
         </p:txBody>
       </p:sp>
@@ -9818,6 +10491,7 @@
           <a:lstStyle/>
           <a:p>
             <a:pPr algn="ctr"/>
+            <a:endParaRPr/>
           </a:p>
         </p:txBody>
       </p:sp>
@@ -9859,7 +10533,7 @@
           </a:fontRef>
         </p:style>
         <p:txBody>
-          <a:bodyPr rtlCol="0" anchor="ctr" wrap="square" tIns="228600" lIns="228600" rIns="182880"/>
+          <a:bodyPr wrap="square" lIns="228600" tIns="228600" rIns="182880" rtlCol="0" anchor="ctr"/>
           <a:lstStyle/>
           <a:p>
             <a:pPr algn="ctr">
@@ -9870,11 +10544,12 @@
               </a:defRPr>
             </a:pPr>
             <a:r>
+              <a:rPr dirty="0"/>
               <a:t>Phase 1</a:t>
             </a:r>
           </a:p>
           <a:p>
-            <a:pPr>
+            <a:pPr algn="ctr">
               <a:spcAft>
                 <a:spcPts val="1400"/>
               </a:spcAft>
@@ -9885,14 +10560,17 @@
               </a:defRPr>
             </a:pPr>
             <a:r>
+              <a:rPr dirty="0"/>
               <a:t>Jan – Apr 2026</a:t>
             </a:r>
           </a:p>
           <a:p>
-            <a:pPr>
+            <a:pPr marL="285750" indent="-285750">
               <a:lnSpc>
                 <a:spcPct val="125000"/>
               </a:lnSpc>
+              <a:buFont typeface="Arial" panose="020B0604020202020204" pitchFamily="34" charset="0"/>
+              <a:buChar char="•"/>
               <a:defRPr sz="1400">
                 <a:solidFill>
                   <a:srgbClr val="333333"/>
@@ -9900,7 +10578,46 @@
               </a:defRPr>
             </a:pPr>
             <a:r>
-              <a:t>Literature review · Dataset (17,947 utterances) · Feature pipeline</a:t>
+              <a:rPr dirty="0"/>
+              <a:t>Literature review </a:t>
+            </a:r>
+            <a:endParaRPr lang="en-US" dirty="0"/>
+          </a:p>
+          <a:p>
+            <a:pPr marL="285750" indent="-285750">
+              <a:lnSpc>
+                <a:spcPct val="125000"/>
+              </a:lnSpc>
+              <a:buFont typeface="Arial" panose="020B0604020202020204" pitchFamily="34" charset="0"/>
+              <a:buChar char="•"/>
+              <a:defRPr sz="1400">
+                <a:solidFill>
+                  <a:srgbClr val="333333"/>
+                </a:solidFill>
+              </a:defRPr>
+            </a:pPr>
+            <a:r>
+              <a:rPr dirty="0"/>
+              <a:t>Dataset (17,947 utterances) </a:t>
+            </a:r>
+            <a:endParaRPr lang="en-US" dirty="0"/>
+          </a:p>
+          <a:p>
+            <a:pPr marL="285750" indent="-285750">
+              <a:lnSpc>
+                <a:spcPct val="125000"/>
+              </a:lnSpc>
+              <a:buFont typeface="Arial" panose="020B0604020202020204" pitchFamily="34" charset="0"/>
+              <a:buChar char="•"/>
+              <a:defRPr sz="1400">
+                <a:solidFill>
+                  <a:srgbClr val="333333"/>
+                </a:solidFill>
+              </a:defRPr>
+            </a:pPr>
+            <a:r>
+              <a:rPr lang="en-IN" dirty="0"/>
+              <a:t>Feature pipeline</a:t>
             </a:r>
           </a:p>
         </p:txBody>
@@ -9913,7 +10630,7 @@
         </p:nvSpPr>
         <p:spPr>
           <a:xfrm>
-            <a:off x="960120" y="5257800"/>
+            <a:off x="1714500" y="5257800"/>
             <a:ext cx="1554480" cy="365760"/>
           </a:xfrm>
           <a:prstGeom prst="roundRect">
@@ -9952,6 +10669,7 @@
               </a:defRPr>
             </a:pPr>
             <a:r>
+              <a:rPr dirty="0"/>
               <a:t>COMPLETE</a:t>
             </a:r>
           </a:p>
@@ -9995,7 +10713,7 @@
           </a:fontRef>
         </p:style>
         <p:txBody>
-          <a:bodyPr rtlCol="0" anchor="ctr" wrap="square" tIns="228600" lIns="228600" rIns="182880"/>
+          <a:bodyPr wrap="square" lIns="228600" tIns="228600" rIns="182880" rtlCol="0" anchor="ctr"/>
           <a:lstStyle/>
           <a:p>
             <a:pPr algn="ctr">
@@ -10006,11 +10724,12 @@
               </a:defRPr>
             </a:pPr>
             <a:r>
+              <a:rPr dirty="0"/>
               <a:t>Phase 2</a:t>
             </a:r>
           </a:p>
           <a:p>
-            <a:pPr>
+            <a:pPr algn="ctr">
               <a:spcAft>
                 <a:spcPts val="1400"/>
               </a:spcAft>
@@ -10021,14 +10740,17 @@
               </a:defRPr>
             </a:pPr>
             <a:r>
+              <a:rPr dirty="0"/>
               <a:t>May – Jul 2026</a:t>
             </a:r>
           </a:p>
           <a:p>
-            <a:pPr>
+            <a:pPr marL="285750" indent="-285750">
               <a:lnSpc>
                 <a:spcPct val="125000"/>
               </a:lnSpc>
+              <a:buFont typeface="Arial" panose="020B0604020202020204" pitchFamily="34" charset="0"/>
+              <a:buChar char="•"/>
               <a:defRPr sz="1400">
                 <a:solidFill>
                   <a:srgbClr val="333333"/>
@@ -10036,7 +10758,46 @@
               </a:defRPr>
             </a:pPr>
             <a:r>
-              <a:t>ML baselines · Feature importance · CNN / CNN-LSTM · Robustness experiments</a:t>
+              <a:rPr dirty="0"/>
+              <a:t>ML baselines </a:t>
+            </a:r>
+            <a:endParaRPr lang="en-US" dirty="0"/>
+          </a:p>
+          <a:p>
+            <a:pPr marL="285750" indent="-285750">
+              <a:lnSpc>
+                <a:spcPct val="125000"/>
+              </a:lnSpc>
+              <a:buFont typeface="Arial" panose="020B0604020202020204" pitchFamily="34" charset="0"/>
+              <a:buChar char="•"/>
+              <a:defRPr sz="1400">
+                <a:solidFill>
+                  <a:srgbClr val="333333"/>
+                </a:solidFill>
+              </a:defRPr>
+            </a:pPr>
+            <a:r>
+              <a:rPr dirty="0"/>
+              <a:t>Feature importance </a:t>
+            </a:r>
+            <a:endParaRPr lang="en-US" dirty="0"/>
+          </a:p>
+          <a:p>
+            <a:pPr marL="285750" indent="-285750">
+              <a:lnSpc>
+                <a:spcPct val="125000"/>
+              </a:lnSpc>
+              <a:buFont typeface="Arial" panose="020B0604020202020204" pitchFamily="34" charset="0"/>
+              <a:buChar char="•"/>
+              <a:defRPr sz="1400">
+                <a:solidFill>
+                  <a:srgbClr val="333333"/>
+                </a:solidFill>
+              </a:defRPr>
+            </a:pPr>
+            <a:r>
+              <a:rPr dirty="0"/>
+              <a:t>CNN / CNN-LSTM · Robustness experiments</a:t>
             </a:r>
           </a:p>
         </p:txBody>
@@ -10049,7 +10810,7 @@
         </p:nvSpPr>
         <p:spPr>
           <a:xfrm>
-            <a:off x="4709160" y="5257800"/>
+            <a:off x="5318607" y="5257800"/>
             <a:ext cx="1554480" cy="365760"/>
           </a:xfrm>
           <a:prstGeom prst="roundRect">
@@ -10131,7 +10892,7 @@
           </a:fontRef>
         </p:style>
         <p:txBody>
-          <a:bodyPr rtlCol="0" anchor="ctr" wrap="square" tIns="228600" lIns="228600" rIns="182880"/>
+          <a:bodyPr wrap="square" lIns="228600" tIns="228600" rIns="182880" rtlCol="0" anchor="ctr"/>
           <a:lstStyle/>
           <a:p>
             <a:pPr algn="ctr">
@@ -10142,11 +10903,12 @@
               </a:defRPr>
             </a:pPr>
             <a:r>
+              <a:rPr dirty="0"/>
               <a:t>Phase 3</a:t>
             </a:r>
           </a:p>
           <a:p>
-            <a:pPr>
+            <a:pPr algn="ctr">
               <a:spcAft>
                 <a:spcPts val="1400"/>
               </a:spcAft>
@@ -10157,14 +10919,25 @@
               </a:defRPr>
             </a:pPr>
             <a:r>
-              <a:t>Aug – Nov 2026</a:t>
-            </a:r>
-          </a:p>
-          <a:p>
-            <a:pPr>
+              <a:rPr dirty="0"/>
+              <a:t>Aug – </a:t>
+            </a:r>
+            <a:r>
+              <a:rPr lang="en-US" dirty="0"/>
+              <a:t>Dec</a:t>
+            </a:r>
+            <a:r>
+              <a:rPr dirty="0"/>
+              <a:t> 2026</a:t>
+            </a:r>
+          </a:p>
+          <a:p>
+            <a:pPr marL="285750" indent="-285750">
               <a:lnSpc>
                 <a:spcPct val="125000"/>
               </a:lnSpc>
+              <a:buFont typeface="Arial" panose="020B0604020202020204" pitchFamily="34" charset="0"/>
+              <a:buChar char="•"/>
               <a:defRPr sz="1400">
                 <a:solidFill>
                   <a:srgbClr val="333333"/>
@@ -10172,7 +10945,46 @@
               </a:defRPr>
             </a:pPr>
             <a:r>
-              <a:t>SHAP + saliency interpretability · Final evaluation &amp; stats · Thesis writing</a:t>
+              <a:rPr dirty="0"/>
+              <a:t>SHAP + saliency interpretability </a:t>
+            </a:r>
+            <a:endParaRPr lang="en-US" dirty="0"/>
+          </a:p>
+          <a:p>
+            <a:pPr marL="285750" indent="-285750">
+              <a:lnSpc>
+                <a:spcPct val="125000"/>
+              </a:lnSpc>
+              <a:buFont typeface="Arial" panose="020B0604020202020204" pitchFamily="34" charset="0"/>
+              <a:buChar char="•"/>
+              <a:defRPr sz="1400">
+                <a:solidFill>
+                  <a:srgbClr val="333333"/>
+                </a:solidFill>
+              </a:defRPr>
+            </a:pPr>
+            <a:r>
+              <a:rPr dirty="0"/>
+              <a:t>Final evaluation &amp; stats </a:t>
+            </a:r>
+            <a:endParaRPr lang="en-US" dirty="0"/>
+          </a:p>
+          <a:p>
+            <a:pPr marL="285750" indent="-285750">
+              <a:lnSpc>
+                <a:spcPct val="125000"/>
+              </a:lnSpc>
+              <a:buFont typeface="Arial" panose="020B0604020202020204" pitchFamily="34" charset="0"/>
+              <a:buChar char="•"/>
+              <a:defRPr sz="1400">
+                <a:solidFill>
+                  <a:srgbClr val="333333"/>
+                </a:solidFill>
+              </a:defRPr>
+            </a:pPr>
+            <a:r>
+              <a:rPr dirty="0"/>
+              <a:t>Thesis writing</a:t>
             </a:r>
           </a:p>
         </p:txBody>
@@ -10185,7 +10997,7 @@
         </p:nvSpPr>
         <p:spPr>
           <a:xfrm>
-            <a:off x="8458200" y="5257800"/>
+            <a:off x="9212580" y="5257800"/>
             <a:ext cx="1554480" cy="365760"/>
           </a:xfrm>
           <a:prstGeom prst="roundRect">
@@ -10262,7 +11074,9 @@
               <a:t>We are here: end of Phase 2, entering Phase 3</a:t>
             </a:r>
           </a:p>
-          <a:p/>
+          <a:p>
+            <a:endParaRPr/>
+          </a:p>
         </p:txBody>
       </p:sp>
     </p:spTree>
@@ -10274,7 +11088,7 @@
 </file>
 
 <file path=ppt/slides/slide6.xml><?xml version="1.0" encoding="utf-8"?>
-<p:sld xmlns:a="http://schemas.openxmlformats.org/drawingml/2006/main" xmlns:p="http://schemas.openxmlformats.org/presentationml/2006/main" xmlns:r="http://schemas.openxmlformats.org/officeDocument/2006/relationships">
+<p:sld xmlns:a="http://schemas.openxmlformats.org/drawingml/2006/main" xmlns:r="http://schemas.openxmlformats.org/officeDocument/2006/relationships" xmlns:p="http://schemas.openxmlformats.org/presentationml/2006/main">
   <p:cSld>
     <p:spTree>
       <p:nvGrpSpPr>
@@ -10282,7 +11096,14 @@
         <p:cNvGrpSpPr/>
         <p:nvPr/>
       </p:nvGrpSpPr>
-      <p:grpSpPr/>
+      <p:grpSpPr>
+        <a:xfrm>
+          <a:off x="0" y="0"/>
+          <a:ext cx="0" cy="0"/>
+          <a:chOff x="0" y="0"/>
+          <a:chExt cx="0" cy="0"/>
+        </a:xfrm>
+      </p:grpSpPr>
       <p:sp>
         <p:nvSpPr>
           <p:cNvPr id="2" name="Rectangle 1"/>
@@ -10324,6 +11145,7 @@
           <a:lstStyle/>
           <a:p>
             <a:pPr algn="ctr"/>
+            <a:endParaRPr/>
           </a:p>
         </p:txBody>
       </p:sp>
@@ -10368,6 +11190,7 @@
           <a:lstStyle/>
           <a:p>
             <a:pPr algn="ctr"/>
+            <a:endParaRPr/>
           </a:p>
         </p:txBody>
       </p:sp>
@@ -10459,6 +11282,7 @@
           <a:lstStyle/>
           <a:p>
             <a:pPr algn="ctr"/>
+            <a:endParaRPr/>
           </a:p>
         </p:txBody>
       </p:sp>
@@ -10470,8 +11294,8 @@
         </p:nvSpPr>
         <p:spPr>
           <a:xfrm>
-            <a:off x="731520" y="1417320"/>
-            <a:ext cx="5760720" cy="4754880"/>
+            <a:off x="1068480" y="1852209"/>
+            <a:ext cx="6099048" cy="3189143"/>
           </a:xfrm>
           <a:prstGeom prst="rect">
             <a:avLst/>
@@ -10498,17 +11322,20 @@
               </a:defRPr>
             </a:pPr>
             <a:r>
+              <a:rPr dirty="0"/>
               <a:t>▸ 17,947 utterances from 10 sources</a:t>
             </a:r>
           </a:p>
           <a:p>
-            <a:pPr lvl="1">
+            <a:pPr marL="742950" lvl="1" indent="-285750">
               <a:lnSpc>
                 <a:spcPct val="115000"/>
               </a:lnSpc>
               <a:spcAft>
                 <a:spcPts val="400"/>
               </a:spcAft>
+              <a:buFont typeface="Arial" panose="020B0604020202020204" pitchFamily="34" charset="0"/>
+              <a:buChar char="•"/>
               <a:defRPr sz="1500">
                 <a:solidFill>
                   <a:srgbClr val="333333"/>
@@ -10516,17 +11343,28 @@
               </a:defRPr>
             </a:pPr>
             <a:r>
-              <a:t>–  Genuine: LibriSpeech test-clean, 2,229 clips, 40 speakers</a:t>
-            </a:r>
-          </a:p>
-          <a:p>
-            <a:pPr lvl="1">
+              <a:rPr dirty="0"/>
+              <a:t>Genuine: </a:t>
+            </a:r>
+            <a:r>
+              <a:rPr dirty="0" err="1"/>
+              <a:t>LibriSpeech</a:t>
+            </a:r>
+            <a:r>
+              <a:rPr dirty="0"/>
+              <a:t> test-clean, 2,229 clips, 40 speakers</a:t>
+            </a:r>
+          </a:p>
+          <a:p>
+            <a:pPr marL="742950" lvl="1" indent="-285750">
               <a:lnSpc>
                 <a:spcPct val="115000"/>
               </a:lnSpc>
               <a:spcAft>
                 <a:spcPts val="400"/>
               </a:spcAft>
+              <a:buFont typeface="Arial" panose="020B0604020202020204" pitchFamily="34" charset="0"/>
+              <a:buChar char="•"/>
               <a:defRPr sz="1500">
                 <a:solidFill>
                   <a:srgbClr val="333333"/>
@@ -10534,7 +11372,16 @@
               </a:defRPr>
             </a:pPr>
             <a:r>
-              <a:t>–  Synthetic: ASVspoof 2019 LA (6 TTS/VC systems), VITS, Tacotron2, Edge-TTS</a:t>
+              <a:rPr dirty="0"/>
+              <a:t>Synthetic: </a:t>
+            </a:r>
+            <a:r>
+              <a:rPr dirty="0" err="1"/>
+              <a:t>ASVspoof</a:t>
+            </a:r>
+            <a:r>
+              <a:rPr dirty="0"/>
+              <a:t> 2019 LA (6 TTS/VC systems), VITS, Tacotron2, Edge-TTS</a:t>
             </a:r>
           </a:p>
           <a:p>
@@ -10552,6 +11399,7 @@
               </a:defRPr>
             </a:pPr>
             <a:r>
+              <a:rPr dirty="0"/>
               <a:t>▸ 8 kHz + G.711 codec simulation (banking telephony)</a:t>
             </a:r>
           </a:p>
@@ -10570,7 +11418,16 @@
               </a:defRPr>
             </a:pPr>
             <a:r>
-              <a:t>▸ 3–8 second utterances (transaction-confirmation length)</a:t>
+              <a:rPr dirty="0"/>
+              <a:t>▸ 3</a:t>
+            </a:r>
+            <a:r>
+              <a:rPr lang="en-US" dirty="0"/>
+              <a:t>-</a:t>
+            </a:r>
+            <a:r>
+              <a:rPr dirty="0"/>
+              <a:t>8 second utterances (transaction-confirmation length)</a:t>
             </a:r>
           </a:p>
           <a:p>
@@ -10588,6 +11445,7 @@
               </a:defRPr>
             </a:pPr>
             <a:r>
+              <a:rPr dirty="0"/>
               <a:t>▸ Strict speaker- and system-independent splits</a:t>
             </a:r>
           </a:p>
@@ -10606,7 +11464,24 @@
               </a:defRPr>
             </a:pPr>
             <a:r>
-              <a:t>▸ Microsoft Edge-TTS held out entirely — unseen-system generalisation test</a:t>
+              <a:rPr dirty="0"/>
+              <a:t>▸ Microsoft Edge-TTS held out entirely </a:t>
+            </a:r>
+            <a:r>
+              <a:rPr lang="en-US" dirty="0"/>
+              <a:t>-</a:t>
+            </a:r>
+            <a:r>
+              <a:rPr dirty="0"/>
+              <a:t> unseen-system </a:t>
+            </a:r>
+            <a:r>
+              <a:rPr dirty="0" err="1"/>
+              <a:t>generalisation</a:t>
+            </a:r>
+            <a:r>
+              <a:rPr dirty="0"/>
+              <a:t> test</a:t>
             </a:r>
           </a:p>
         </p:txBody>
@@ -10621,14 +11496,15 @@
         </p:nvPicPr>
         <p:blipFill>
           <a:blip r:embed="rId2"/>
+          <a:srcRect l="73306"/>
           <a:stretch>
             <a:fillRect/>
           </a:stretch>
         </p:blipFill>
         <p:spPr>
           <a:xfrm>
-            <a:off x="6583680" y="1554480"/>
-            <a:ext cx="4937760" cy="1826912"/>
+            <a:off x="8742695" y="3675237"/>
+            <a:ext cx="2065513" cy="2862867"/>
           </a:xfrm>
           <a:prstGeom prst="rect">
             <a:avLst/>
@@ -10668,9 +11544,42 @@
               <a:t>Midterm Evaluation — Phase 1 + Phase 2</a:t>
             </a:r>
           </a:p>
-          <a:p/>
-        </p:txBody>
-      </p:sp>
+          <a:p>
+            <a:endParaRPr/>
+          </a:p>
+        </p:txBody>
+      </p:sp>
+      <p:pic>
+        <p:nvPicPr>
+          <p:cNvPr id="10" name="Picture 9" descr="Fig2_Dataset_Composition.png">
+            <a:extLst>
+              <a:ext uri="{FF2B5EF4-FFF2-40B4-BE49-F238E27FC236}">
+                <a16:creationId xmlns:a16="http://schemas.microsoft.com/office/drawing/2014/main" id="{14305C89-77DA-4C3B-4350-3AAFE0AABDA2}"/>
+              </a:ext>
+            </a:extLst>
+          </p:cNvPr>
+          <p:cNvPicPr>
+            <a:picLocks noChangeAspect="1"/>
+          </p:cNvPicPr>
+          <p:nvPr/>
+        </p:nvPicPr>
+        <p:blipFill>
+          <a:blip r:embed="rId2"/>
+          <a:srcRect r="33622"/>
+          <a:stretch>
+            <a:fillRect/>
+          </a:stretch>
+        </p:blipFill>
+        <p:spPr>
+          <a:xfrm>
+            <a:off x="7636615" y="1162635"/>
+            <a:ext cx="4097880" cy="2284146"/>
+          </a:xfrm>
+          <a:prstGeom prst="rect">
+            <a:avLst/>
+          </a:prstGeom>
+        </p:spPr>
+      </p:pic>
     </p:spTree>
   </p:cSld>
   <p:clrMapOvr>
@@ -10680,7 +11589,7 @@
 </file>
 
 <file path=ppt/slides/slide7.xml><?xml version="1.0" encoding="utf-8"?>
-<p:sld xmlns:a="http://schemas.openxmlformats.org/drawingml/2006/main" xmlns:p="http://schemas.openxmlformats.org/presentationml/2006/main" xmlns:r="http://schemas.openxmlformats.org/officeDocument/2006/relationships">
+<p:sld xmlns:a="http://schemas.openxmlformats.org/drawingml/2006/main" xmlns:r="http://schemas.openxmlformats.org/officeDocument/2006/relationships" xmlns:p="http://schemas.openxmlformats.org/presentationml/2006/main">
   <p:cSld>
     <p:spTree>
       <p:nvGrpSpPr>
@@ -10688,7 +11597,14 @@
         <p:cNvGrpSpPr/>
         <p:nvPr/>
       </p:nvGrpSpPr>
-      <p:grpSpPr/>
+      <p:grpSpPr>
+        <a:xfrm>
+          <a:off x="0" y="0"/>
+          <a:ext cx="0" cy="0"/>
+          <a:chOff x="0" y="0"/>
+          <a:chExt cx="0" cy="0"/>
+        </a:xfrm>
+      </p:grpSpPr>
       <p:sp>
         <p:nvSpPr>
           <p:cNvPr id="2" name="Rectangle 1"/>
@@ -10730,6 +11646,7 @@
           <a:lstStyle/>
           <a:p>
             <a:pPr algn="ctr"/>
+            <a:endParaRPr/>
           </a:p>
         </p:txBody>
       </p:sp>
@@ -10774,6 +11691,7 @@
           <a:lstStyle/>
           <a:p>
             <a:pPr algn="ctr"/>
+            <a:endParaRPr/>
           </a:p>
         </p:txBody>
       </p:sp>
@@ -10865,6 +11783,7 @@
           <a:lstStyle/>
           <a:p>
             <a:pPr algn="ctr"/>
+            <a:endParaRPr/>
           </a:p>
         </p:txBody>
       </p:sp>
@@ -10876,8 +11795,8 @@
         </p:nvSpPr>
         <p:spPr>
           <a:xfrm>
-            <a:off x="731520" y="1417320"/>
-            <a:ext cx="5760720" cy="4754880"/>
+            <a:off x="762000" y="2103120"/>
+            <a:ext cx="5760720" cy="3387402"/>
           </a:xfrm>
           <a:prstGeom prst="rect">
             <a:avLst/>
@@ -10904,17 +11823,44 @@
               </a:defRPr>
             </a:pPr>
             <a:r>
-              <a:t>▸ 257-dim handcrafted feature vector (Librosa, 25 ms window / 10 ms hop)</a:t>
-            </a:r>
-          </a:p>
-          <a:p>
-            <a:pPr lvl="1">
+              <a:rPr dirty="0"/>
+              <a:t>▸ 257-dim handcrafted feature vector (</a:t>
+            </a:r>
+            <a:r>
+              <a:rPr dirty="0" err="1"/>
+              <a:t>Librosa</a:t>
+            </a:r>
+            <a:r>
+              <a:rPr dirty="0"/>
+              <a:t>, 25 </a:t>
+            </a:r>
+            <a:r>
+              <a:rPr dirty="0" err="1"/>
+              <a:t>ms</a:t>
+            </a:r>
+            <a:r>
+              <a:rPr dirty="0"/>
+              <a:t> window / 10 </a:t>
+            </a:r>
+            <a:r>
+              <a:rPr dirty="0" err="1"/>
+              <a:t>ms</a:t>
+            </a:r>
+            <a:r>
+              <a:rPr dirty="0"/>
+              <a:t> hop)</a:t>
+            </a:r>
+          </a:p>
+          <a:p>
+            <a:pPr marL="742950" lvl="1" indent="-285750">
               <a:lnSpc>
                 <a:spcPct val="115000"/>
               </a:lnSpc>
               <a:spcAft>
                 <a:spcPts val="400"/>
               </a:spcAft>
+              <a:buFont typeface="Arial" panose="020B0604020202020204" pitchFamily="34" charset="0"/>
+              <a:buChar char="•"/>
               <a:defRPr sz="1500">
                 <a:solidFill>
                   <a:srgbClr val="333333"/>
@@ -10922,17 +11868,28 @@
               </a:defRPr>
             </a:pPr>
             <a:r>
-              <a:t>–  MFCC (40 coeff. × static/Δ/ΔΔ) = 120 dims</a:t>
-            </a:r>
-          </a:p>
-          <a:p>
-            <a:pPr lvl="1">
+              <a:rPr dirty="0"/>
+              <a:t>MFCC (40 </a:t>
+            </a:r>
+            <a:r>
+              <a:rPr dirty="0" err="1"/>
+              <a:t>coeff</a:t>
+            </a:r>
+            <a:r>
+              <a:rPr dirty="0"/>
+              <a:t>. × static/Δ/ΔΔ) = 120 dims</a:t>
+            </a:r>
+          </a:p>
+          <a:p>
+            <a:pPr marL="742950" lvl="1" indent="-285750">
               <a:lnSpc>
                 <a:spcPct val="115000"/>
               </a:lnSpc>
               <a:spcAft>
                 <a:spcPts val="400"/>
               </a:spcAft>
+              <a:buFont typeface="Arial" panose="020B0604020202020204" pitchFamily="34" charset="0"/>
+              <a:buChar char="•"/>
               <a:defRPr sz="1500">
                 <a:solidFill>
                   <a:srgbClr val="333333"/>
@@ -10940,7 +11897,16 @@
               </a:defRPr>
             </a:pPr>
             <a:r>
-              <a:t>–  Spectral centroid, bandwidth, rolloff, ZCR, HNR, pitch, phase difference</a:t>
+              <a:rPr dirty="0"/>
+              <a:t>Spectral centroid, bandwidth, </a:t>
+            </a:r>
+            <a:r>
+              <a:rPr dirty="0" err="1"/>
+              <a:t>rolloff</a:t>
+            </a:r>
+            <a:r>
+              <a:rPr dirty="0"/>
+              <a:t>, ZCR, HNR, pitch, phase difference</a:t>
             </a:r>
           </a:p>
           <a:p>
@@ -10958,6 +11924,7 @@
               </a:defRPr>
             </a:pPr>
             <a:r>
+              <a:rPr dirty="0"/>
               <a:t>▸ 128-bin log-Mel spectrograms for deep learning models (128×128)</a:t>
             </a:r>
           </a:p>
@@ -10976,8 +11943,22 @@
               </a:defRPr>
             </a:pPr>
             <a:r>
-              <a:t>▸ All hyperparameters centralised in config.yaml</a:t>
-            </a:r>
+              <a:rPr dirty="0"/>
+              <a:t>▸ All hyperparameters </a:t>
+            </a:r>
+            <a:r>
+              <a:rPr dirty="0" err="1"/>
+              <a:t>centralised</a:t>
+            </a:r>
+            <a:r>
+              <a:rPr dirty="0"/>
+              <a:t> in </a:t>
+            </a:r>
+            <a:r>
+              <a:rPr dirty="0" err="1"/>
+              <a:t>config.yaml</a:t>
+            </a:r>
+            <a:endParaRPr dirty="0"/>
           </a:p>
           <a:p>
             <a:pPr>
@@ -10994,7 +11975,16 @@
               </a:defRPr>
             </a:pPr>
             <a:r>
-              <a:t>▸ diagnose.py validates class balance, NaNs, inter-class separation</a:t>
+              <a:rPr dirty="0"/>
+              <a:t>▸ diagnose.py validates class balance, </a:t>
+            </a:r>
+            <a:r>
+              <a:rPr dirty="0" err="1"/>
+              <a:t>NaNs</a:t>
+            </a:r>
+            <a:r>
+              <a:rPr dirty="0"/>
+              <a:t>, inter-class separation</a:t>
             </a:r>
           </a:p>
         </p:txBody>
@@ -11015,8 +12005,8 @@
         </p:blipFill>
         <p:spPr>
           <a:xfrm>
-            <a:off x="6583680" y="1554480"/>
-            <a:ext cx="4937760" cy="2644985"/>
+            <a:off x="6522720" y="1387348"/>
+            <a:ext cx="4937760" cy="5084064"/>
           </a:xfrm>
           <a:prstGeom prst="rect">
             <a:avLst/>
@@ -11056,7 +12046,9 @@
               <a:t>Midterm Evaluation — Phase 1 + Phase 2</a:t>
             </a:r>
           </a:p>
-          <a:p/>
+          <a:p>
+            <a:endParaRPr/>
+          </a:p>
         </p:txBody>
       </p:sp>
     </p:spTree>
@@ -11068,7 +12060,7 @@
 </file>
 
 <file path=ppt/slides/slide8.xml><?xml version="1.0" encoding="utf-8"?>
-<p:sld xmlns:a="http://schemas.openxmlformats.org/drawingml/2006/main" xmlns:p="http://schemas.openxmlformats.org/presentationml/2006/main" xmlns:r="http://schemas.openxmlformats.org/officeDocument/2006/relationships">
+<p:sld xmlns:a="http://schemas.openxmlformats.org/drawingml/2006/main" xmlns:r="http://schemas.openxmlformats.org/officeDocument/2006/relationships" xmlns:p="http://schemas.openxmlformats.org/presentationml/2006/main">
   <p:cSld>
     <p:spTree>
       <p:nvGrpSpPr>
@@ -11076,7 +12068,14 @@
         <p:cNvGrpSpPr/>
         <p:nvPr/>
       </p:nvGrpSpPr>
-      <p:grpSpPr/>
+      <p:grpSpPr>
+        <a:xfrm>
+          <a:off x="0" y="0"/>
+          <a:ext cx="0" cy="0"/>
+          <a:chOff x="0" y="0"/>
+          <a:chExt cx="0" cy="0"/>
+        </a:xfrm>
+      </p:grpSpPr>
       <p:sp>
         <p:nvSpPr>
           <p:cNvPr id="2" name="Rectangle 1"/>
@@ -11118,6 +12117,7 @@
           <a:lstStyle/>
           <a:p>
             <a:pPr algn="ctr"/>
+            <a:endParaRPr/>
           </a:p>
         </p:txBody>
       </p:sp>
@@ -11162,6 +12162,7 @@
           <a:lstStyle/>
           <a:p>
             <a:pPr algn="ctr"/>
+            <a:endParaRPr/>
           </a:p>
         </p:txBody>
       </p:sp>
@@ -11253,6 +12254,7 @@
           <a:lstStyle/>
           <a:p>
             <a:pPr algn="ctr"/>
+            <a:endParaRPr/>
           </a:p>
         </p:txBody>
       </p:sp>
@@ -11275,12 +12277,48 @@
                 <a:tableStyleId>{5C22544A-7EE6-4342-B048-85BDC9FD1C3A}</a:tableStyleId>
               </a:tblPr>
               <a:tblGrid>
-                <a:gridCol w="2377440"/>
-                <a:gridCol w="1828800"/>
-                <a:gridCol w="1554480"/>
-                <a:gridCol w="1554480"/>
-                <a:gridCol w="1554480"/>
-                <a:gridCol w="1554480"/>
+                <a:gridCol w="2377440">
+                  <a:extLst>
+                    <a:ext uri="{9D8B030D-6E8A-4147-A177-3AD203B41FA5}">
+                      <a16:colId xmlns:a16="http://schemas.microsoft.com/office/drawing/2014/main" val="20000"/>
+                    </a:ext>
+                  </a:extLst>
+                </a:gridCol>
+                <a:gridCol w="1828800">
+                  <a:extLst>
+                    <a:ext uri="{9D8B030D-6E8A-4147-A177-3AD203B41FA5}">
+                      <a16:colId xmlns:a16="http://schemas.microsoft.com/office/drawing/2014/main" val="20001"/>
+                    </a:ext>
+                  </a:extLst>
+                </a:gridCol>
+                <a:gridCol w="1554480">
+                  <a:extLst>
+                    <a:ext uri="{9D8B030D-6E8A-4147-A177-3AD203B41FA5}">
+                      <a16:colId xmlns:a16="http://schemas.microsoft.com/office/drawing/2014/main" val="20002"/>
+                    </a:ext>
+                  </a:extLst>
+                </a:gridCol>
+                <a:gridCol w="1554480">
+                  <a:extLst>
+                    <a:ext uri="{9D8B030D-6E8A-4147-A177-3AD203B41FA5}">
+                      <a16:colId xmlns:a16="http://schemas.microsoft.com/office/drawing/2014/main" val="20003"/>
+                    </a:ext>
+                  </a:extLst>
+                </a:gridCol>
+                <a:gridCol w="1554480">
+                  <a:extLst>
+                    <a:ext uri="{9D8B030D-6E8A-4147-A177-3AD203B41FA5}">
+                      <a16:colId xmlns:a16="http://schemas.microsoft.com/office/drawing/2014/main" val="20004"/>
+                    </a:ext>
+                  </a:extLst>
+                </a:gridCol>
+                <a:gridCol w="1554480">
+                  <a:extLst>
+                    <a:ext uri="{9D8B030D-6E8A-4147-A177-3AD203B41FA5}">
+                      <a16:colId xmlns:a16="http://schemas.microsoft.com/office/drawing/2014/main" val="20005"/>
+                    </a:ext>
+                  </a:extLst>
+                </a:gridCol>
               </a:tblGrid>
               <a:tr h="457200">
                 <a:tc>
@@ -11421,6 +12459,11 @@
                     </a:solidFill>
                   </a:tcPr>
                 </a:tc>
+                <a:extLst>
+                  <a:ext uri="{0D108BD9-81ED-4DB2-BD59-A6C34878D82A}">
+                    <a16:rowId xmlns:a16="http://schemas.microsoft.com/office/drawing/2014/main" val="10000"/>
+                  </a:ext>
+                </a:extLst>
               </a:tr>
               <a:tr h="457200">
                 <a:tc>
@@ -11561,6 +12604,11 @@
                     </a:solidFill>
                   </a:tcPr>
                 </a:tc>
+                <a:extLst>
+                  <a:ext uri="{0D108BD9-81ED-4DB2-BD59-A6C34878D82A}">
+                    <a16:rowId xmlns:a16="http://schemas.microsoft.com/office/drawing/2014/main" val="10001"/>
+                  </a:ext>
+                </a:extLst>
               </a:tr>
               <a:tr h="457200">
                 <a:tc>
@@ -11701,6 +12749,11 @@
                     </a:solidFill>
                   </a:tcPr>
                 </a:tc>
+                <a:extLst>
+                  <a:ext uri="{0D108BD9-81ED-4DB2-BD59-A6C34878D82A}">
+                    <a16:rowId xmlns:a16="http://schemas.microsoft.com/office/drawing/2014/main" val="10002"/>
+                  </a:ext>
+                </a:extLst>
               </a:tr>
               <a:tr h="457200">
                 <a:tc>
@@ -11841,6 +12894,11 @@
                     </a:solidFill>
                   </a:tcPr>
                 </a:tc>
+                <a:extLst>
+                  <a:ext uri="{0D108BD9-81ED-4DB2-BD59-A6C34878D82A}">
+                    <a16:rowId xmlns:a16="http://schemas.microsoft.com/office/drawing/2014/main" val="10003"/>
+                  </a:ext>
+                </a:extLst>
               </a:tr>
               <a:tr h="457200">
                 <a:tc>
@@ -11981,6 +13039,11 @@
                     </a:solidFill>
                   </a:tcPr>
                 </a:tc>
+                <a:extLst>
+                  <a:ext uri="{0D108BD9-81ED-4DB2-BD59-A6C34878D82A}">
+                    <a16:rowId xmlns:a16="http://schemas.microsoft.com/office/drawing/2014/main" val="10004"/>
+                  </a:ext>
+                </a:extLst>
               </a:tr>
               <a:tr h="457200">
                 <a:tc>
@@ -12121,6 +13184,11 @@
                     </a:solidFill>
                   </a:tcPr>
                 </a:tc>
+                <a:extLst>
+                  <a:ext uri="{0D108BD9-81ED-4DB2-BD59-A6C34878D82A}">
+                    <a16:rowId xmlns:a16="http://schemas.microsoft.com/office/drawing/2014/main" val="10005"/>
+                  </a:ext>
+                </a:extLst>
               </a:tr>
               <a:tr h="457200">
                 <a:tc>
@@ -12261,6 +13329,11 @@
                     </a:solidFill>
                   </a:tcPr>
                 </a:tc>
+                <a:extLst>
+                  <a:ext uri="{0D108BD9-81ED-4DB2-BD59-A6C34878D82A}">
+                    <a16:rowId xmlns:a16="http://schemas.microsoft.com/office/drawing/2014/main" val="10006"/>
+                  </a:ext>
+                </a:extLst>
               </a:tr>
             </a:tbl>
           </a:graphicData>
@@ -12275,7 +13348,7 @@
         <p:spPr>
           <a:xfrm>
             <a:off x="731520" y="4754880"/>
-            <a:ext cx="10698480" cy="822960"/>
+            <a:ext cx="10698480" cy="523220"/>
           </a:xfrm>
           <a:prstGeom prst="rect">
             <a:avLst/>
@@ -12296,7 +13369,22 @@
               </a:defRPr>
             </a:pPr>
             <a:r>
-              <a:t>SVM (RBF kernel, C=10) is the strongest classical baseline. All three models trained with SMOTE + class-weighting inside 5-fold CV. † Gen. test = held-out Edge-TTS, unseen in training.</a:t>
+              <a:rPr dirty="0"/>
+              <a:t>SVM (RBF kernel, C=10) is the strongest classical baseline. All three models trained with SMOTE + class-weighting inside 5-fold CV. </a:t>
+            </a:r>
+            <a:endParaRPr lang="en-US" dirty="0"/>
+          </a:p>
+          <a:p>
+            <a:pPr>
+              <a:defRPr sz="1400" i="1">
+                <a:solidFill>
+                  <a:srgbClr val="333333"/>
+                </a:solidFill>
+              </a:defRPr>
+            </a:pPr>
+            <a:r>
+              <a:rPr dirty="0"/>
+              <a:t>† Gen. test = held-out Edge-TTS, unseen in training.</a:t>
             </a:r>
           </a:p>
         </p:txBody>
@@ -12334,7 +13422,9 @@
               <a:t>Midterm Evaluation — Phase 1 + Phase 2</a:t>
             </a:r>
           </a:p>
-          <a:p/>
+          <a:p>
+            <a:endParaRPr/>
+          </a:p>
         </p:txBody>
       </p:sp>
     </p:spTree>
@@ -12346,7 +13436,7 @@
 </file>
 
 <file path=ppt/slides/slide9.xml><?xml version="1.0" encoding="utf-8"?>
-<p:sld xmlns:a="http://schemas.openxmlformats.org/drawingml/2006/main" xmlns:p="http://schemas.openxmlformats.org/presentationml/2006/main" xmlns:r="http://schemas.openxmlformats.org/officeDocument/2006/relationships">
+<p:sld xmlns:a="http://schemas.openxmlformats.org/drawingml/2006/main" xmlns:r="http://schemas.openxmlformats.org/officeDocument/2006/relationships" xmlns:p="http://schemas.openxmlformats.org/presentationml/2006/main">
   <p:cSld>
     <p:spTree>
       <p:nvGrpSpPr>
@@ -12354,7 +13444,14 @@
         <p:cNvGrpSpPr/>
         <p:nvPr/>
       </p:nvGrpSpPr>
-      <p:grpSpPr/>
+      <p:grpSpPr>
+        <a:xfrm>
+          <a:off x="0" y="0"/>
+          <a:ext cx="0" cy="0"/>
+          <a:chOff x="0" y="0"/>
+          <a:chExt cx="0" cy="0"/>
+        </a:xfrm>
+      </p:grpSpPr>
       <p:sp>
         <p:nvSpPr>
           <p:cNvPr id="2" name="Rectangle 1"/>
@@ -12396,6 +13493,7 @@
           <a:lstStyle/>
           <a:p>
             <a:pPr algn="ctr"/>
+            <a:endParaRPr/>
           </a:p>
         </p:txBody>
       </p:sp>
@@ -12440,6 +13538,7 @@
           <a:lstStyle/>
           <a:p>
             <a:pPr algn="ctr"/>
+            <a:endParaRPr/>
           </a:p>
         </p:txBody>
       </p:sp>
@@ -12531,6 +13630,7 @@
           <a:lstStyle/>
           <a:p>
             <a:pPr algn="ctr"/>
+            <a:endParaRPr/>
           </a:p>
         </p:txBody>
       </p:sp>
@@ -12542,8 +13642,8 @@
         </p:nvSpPr>
         <p:spPr>
           <a:xfrm>
-            <a:off x="731520" y="1463040"/>
-            <a:ext cx="5120640" cy="4389120"/>
+            <a:off x="579120" y="1785620"/>
+            <a:ext cx="5120640" cy="3371500"/>
           </a:xfrm>
           <a:prstGeom prst="rect">
             <a:avLst/>
@@ -12570,6 +13670,7 @@
               </a:defRPr>
             </a:pPr>
             <a:r>
+              <a:rPr dirty="0"/>
               <a:t>▸ Random Forest importance ranking over the 257-dim feature vector</a:t>
             </a:r>
           </a:p>
@@ -12588,17 +13689,36 @@
               </a:defRPr>
             </a:pPr>
             <a:r>
-              <a:t>▸ Delta-MFCC coefficients dominate (delta_mfcc_6_mean, delta_mfcc_5_mean)</a:t>
-            </a:r>
-          </a:p>
-          <a:p>
-            <a:pPr lvl="1">
+              <a:rPr dirty="0"/>
+              <a:t>▸ Delta-MFCC coefficients </a:t>
+            </a:r>
+            <a:r>
+              <a:rPr dirty="0" err="1"/>
+              <a:t>domi</a:t>
+            </a:r>
+            <a:r>
+              <a:rPr lang="en-IN" dirty="0" err="1"/>
+              <a:t>nate</a:t>
+            </a:r>
+            <a:r>
+              <a:rPr lang="en-IN" dirty="0"/>
+              <a:t> (delta_</a:t>
+            </a:r>
+            <a:r>
+              <a:rPr dirty="0"/>
+              <a:t>mfcc_6_mean, delta_mfcc_5_mean)</a:t>
+            </a:r>
+          </a:p>
+          <a:p>
+            <a:pPr marL="742950" lvl="1" indent="-285750">
               <a:lnSpc>
                 <a:spcPct val="115000"/>
               </a:lnSpc>
               <a:spcAft>
                 <a:spcPts val="400"/>
               </a:spcAft>
+              <a:buFont typeface="Arial" panose="020B0604020202020204" pitchFamily="34" charset="0"/>
+              <a:buChar char="•"/>
               <a:defRPr sz="1500">
                 <a:solidFill>
                   <a:srgbClr val="333333"/>
@@ -12606,7 +13726,8 @@
               </a:defRPr>
             </a:pPr>
             <a:r>
-              <a:t>–  → TTS vocoders impose smoother, more regular spectral dynamics than natural articulation</a:t>
+              <a:rPr dirty="0"/>
+              <a:t>TTS vocoders impose smoother, more regular spectral dynamics than natural articulation</a:t>
             </a:r>
           </a:p>
           <a:p>
@@ -12624,7 +13745,16 @@
               </a:defRPr>
             </a:pPr>
             <a:r>
-              <a:t>▸ phase_diff_mean ranks 16th — validates inclusion of phase-based features</a:t>
+              <a:rPr dirty="0"/>
+              <a:t>▸ </a:t>
+            </a:r>
+            <a:r>
+              <a:rPr dirty="0" err="1"/>
+              <a:t>phase_diff_mean</a:t>
+            </a:r>
+            <a:r>
+              <a:rPr dirty="0"/>
+              <a:t> ranks 16th — validates inclusion of phase-based features</a:t>
             </a:r>
           </a:p>
           <a:p>
@@ -12642,7 +13772,16 @@
               </a:defRPr>
             </a:pPr>
             <a:r>
-              <a:t>▸ Spectral centroid &amp; rolloff appear as secondary discriminators</a:t>
+              <a:rPr dirty="0"/>
+              <a:t>▸ Spectral centroid &amp; </a:t>
+            </a:r>
+            <a:r>
+              <a:rPr dirty="0" err="1"/>
+              <a:t>rolloff</a:t>
+            </a:r>
+            <a:r>
+              <a:rPr dirty="0"/>
+              <a:t> appear as secondary discriminators</a:t>
             </a:r>
           </a:p>
         </p:txBody>
@@ -12664,7 +13803,7 @@
         <p:spPr>
           <a:xfrm>
             <a:off x="6126480" y="1417320"/>
-            <a:ext cx="5486400" cy="3796855"/>
+            <a:ext cx="5486400" cy="4389120"/>
           </a:xfrm>
           <a:prstGeom prst="rect">
             <a:avLst/>
@@ -12704,7 +13843,9 @@
               <a:t>Midterm Evaluation — Phase 1 + Phase 2</a:t>
             </a:r>
           </a:p>
-          <a:p/>
+          <a:p>
+            <a:endParaRPr/>
+          </a:p>
         </p:txBody>
       </p:sp>
     </p:spTree>
